--- a/backend/data/template_water_management.pptx
+++ b/backend/data/template_water_management.pptx
@@ -3089,14 +3089,6 @@
 <file path=ppt/slides/slide1.xml><?xml version="1.0" encoding="utf-8"?>
 <p:sld xmlns:a="http://schemas.openxmlformats.org/drawingml/2006/main" xmlns:p="http://schemas.openxmlformats.org/presentationml/2006/main" xmlns:r="http://schemas.openxmlformats.org/officeDocument/2006/relationships">
   <p:cSld>
-    <p:bg>
-      <p:bgPr>
-        <a:solidFill>
-          <a:srgbClr val="F0F7FA"/>
-        </a:solidFill>
-        <a:effectLst/>
-      </p:bgPr>
-    </p:bg>
     <p:spTree>
       <p:nvGrpSpPr>
         <p:cNvPr id="1" name=""/>
@@ -3113,13 +3105,13 @@
         <p:spPr>
           <a:xfrm>
             <a:off x="0" y="0"/>
-            <a:ext cx="12191695" cy="1097280"/>
-          </a:xfrm>
-          <a:prstGeom prst="rect">
-            <a:avLst/>
-          </a:prstGeom>
-          <a:solidFill>
-            <a:srgbClr val="2E7D32"/>
+            <a:ext cx="12191695" cy="6858000"/>
+          </a:xfrm>
+          <a:prstGeom prst="rect">
+            <a:avLst/>
+          </a:prstGeom>
+          <a:solidFill>
+            <a:srgbClr val="143719"/>
           </a:solidFill>
           <a:ln>
             <a:noFill/>
@@ -3155,14 +3147,14 @@
         </p:nvSpPr>
         <p:spPr>
           <a:xfrm>
-            <a:off x="0" y="5760720"/>
-            <a:ext cx="12191695" cy="1097280"/>
-          </a:xfrm>
-          <a:prstGeom prst="rect">
-            <a:avLst/>
-          </a:prstGeom>
-          <a:solidFill>
-            <a:srgbClr val="1B5E20"/>
+            <a:off x="0" y="5029200"/>
+            <a:ext cx="12191695" cy="1828800"/>
+          </a:xfrm>
+          <a:prstGeom prst="rect">
+            <a:avLst/>
+          </a:prstGeom>
+          <a:solidFill>
+            <a:srgbClr val="328C3C"/>
           </a:solidFill>
           <a:ln>
             <a:noFill/>
@@ -3192,20 +3184,20 @@
       </p:sp>
       <p:sp>
         <p:nvSpPr>
-          <p:cNvPr id="4" name="Rectangle 3"/>
+          <p:cNvPr id="4" name="Oval 3"/>
           <p:cNvSpPr/>
           <p:nvPr/>
         </p:nvSpPr>
         <p:spPr>
           <a:xfrm>
-            <a:off x="731520" y="1645920"/>
-            <a:ext cx="137160" cy="1371600"/>
-          </a:xfrm>
-          <a:prstGeom prst="rect">
-            <a:avLst/>
-          </a:prstGeom>
-          <a:solidFill>
-            <a:srgbClr val="2E7D32"/>
+            <a:off x="0" y="4572000"/>
+            <a:ext cx="1371600" cy="1371600"/>
+          </a:xfrm>
+          <a:prstGeom prst="ellipse">
+            <a:avLst/>
+          </a:prstGeom>
+          <a:solidFill>
+            <a:srgbClr val="328C3C"/>
           </a:solidFill>
           <a:ln>
             <a:noFill/>
@@ -3235,14 +3227,401 @@
       </p:sp>
       <p:sp>
         <p:nvSpPr>
-          <p:cNvPr id="5" name="TextBox 4"/>
+          <p:cNvPr id="5" name="Oval 4"/>
+          <p:cNvSpPr/>
+          <p:nvPr/>
+        </p:nvSpPr>
+        <p:spPr>
+          <a:xfrm>
+            <a:off x="2286000" y="4572000"/>
+            <a:ext cx="1371600" cy="1371600"/>
+          </a:xfrm>
+          <a:prstGeom prst="ellipse">
+            <a:avLst/>
+          </a:prstGeom>
+          <a:solidFill>
+            <a:srgbClr val="328C3C"/>
+          </a:solidFill>
+          <a:ln>
+            <a:noFill/>
+          </a:ln>
+        </p:spPr>
+        <p:style>
+          <a:lnRef idx="1">
+            <a:schemeClr val="accent1"/>
+          </a:lnRef>
+          <a:fillRef idx="3">
+            <a:schemeClr val="accent1"/>
+          </a:fillRef>
+          <a:effectRef idx="2">
+            <a:schemeClr val="accent1"/>
+          </a:effectRef>
+          <a:fontRef idx="minor">
+            <a:schemeClr val="lt1"/>
+          </a:fontRef>
+        </p:style>
+        <p:txBody>
+          <a:bodyPr rtlCol="0" anchor="ctr"/>
+          <a:lstStyle/>
+          <a:p>
+            <a:pPr algn="ctr"/>
+          </a:p>
+        </p:txBody>
+      </p:sp>
+      <p:sp>
+        <p:nvSpPr>
+          <p:cNvPr id="6" name="Oval 5"/>
+          <p:cNvSpPr/>
+          <p:nvPr/>
+        </p:nvSpPr>
+        <p:spPr>
+          <a:xfrm>
+            <a:off x="4572000" y="4572000"/>
+            <a:ext cx="1371600" cy="1371600"/>
+          </a:xfrm>
+          <a:prstGeom prst="ellipse">
+            <a:avLst/>
+          </a:prstGeom>
+          <a:solidFill>
+            <a:srgbClr val="328C3C"/>
+          </a:solidFill>
+          <a:ln>
+            <a:noFill/>
+          </a:ln>
+        </p:spPr>
+        <p:style>
+          <a:lnRef idx="1">
+            <a:schemeClr val="accent1"/>
+          </a:lnRef>
+          <a:fillRef idx="3">
+            <a:schemeClr val="accent1"/>
+          </a:fillRef>
+          <a:effectRef idx="2">
+            <a:schemeClr val="accent1"/>
+          </a:effectRef>
+          <a:fontRef idx="minor">
+            <a:schemeClr val="lt1"/>
+          </a:fontRef>
+        </p:style>
+        <p:txBody>
+          <a:bodyPr rtlCol="0" anchor="ctr"/>
+          <a:lstStyle/>
+          <a:p>
+            <a:pPr algn="ctr"/>
+          </a:p>
+        </p:txBody>
+      </p:sp>
+      <p:sp>
+        <p:nvSpPr>
+          <p:cNvPr id="7" name="Oval 6"/>
+          <p:cNvSpPr/>
+          <p:nvPr/>
+        </p:nvSpPr>
+        <p:spPr>
+          <a:xfrm>
+            <a:off x="6858000" y="4572000"/>
+            <a:ext cx="1371600" cy="1371600"/>
+          </a:xfrm>
+          <a:prstGeom prst="ellipse">
+            <a:avLst/>
+          </a:prstGeom>
+          <a:solidFill>
+            <a:srgbClr val="328C3C"/>
+          </a:solidFill>
+          <a:ln>
+            <a:noFill/>
+          </a:ln>
+        </p:spPr>
+        <p:style>
+          <a:lnRef idx="1">
+            <a:schemeClr val="accent1"/>
+          </a:lnRef>
+          <a:fillRef idx="3">
+            <a:schemeClr val="accent1"/>
+          </a:fillRef>
+          <a:effectRef idx="2">
+            <a:schemeClr val="accent1"/>
+          </a:effectRef>
+          <a:fontRef idx="minor">
+            <a:schemeClr val="lt1"/>
+          </a:fontRef>
+        </p:style>
+        <p:txBody>
+          <a:bodyPr rtlCol="0" anchor="ctr"/>
+          <a:lstStyle/>
+          <a:p>
+            <a:pPr algn="ctr"/>
+          </a:p>
+        </p:txBody>
+      </p:sp>
+      <p:sp>
+        <p:nvSpPr>
+          <p:cNvPr id="8" name="Oval 7"/>
+          <p:cNvSpPr/>
+          <p:nvPr/>
+        </p:nvSpPr>
+        <p:spPr>
+          <a:xfrm>
+            <a:off x="9144000" y="4572000"/>
+            <a:ext cx="1371600" cy="1371600"/>
+          </a:xfrm>
+          <a:prstGeom prst="ellipse">
+            <a:avLst/>
+          </a:prstGeom>
+          <a:solidFill>
+            <a:srgbClr val="328C3C"/>
+          </a:solidFill>
+          <a:ln>
+            <a:noFill/>
+          </a:ln>
+        </p:spPr>
+        <p:style>
+          <a:lnRef idx="1">
+            <a:schemeClr val="accent1"/>
+          </a:lnRef>
+          <a:fillRef idx="3">
+            <a:schemeClr val="accent1"/>
+          </a:fillRef>
+          <a:effectRef idx="2">
+            <a:schemeClr val="accent1"/>
+          </a:effectRef>
+          <a:fontRef idx="minor">
+            <a:schemeClr val="lt1"/>
+          </a:fontRef>
+        </p:style>
+        <p:txBody>
+          <a:bodyPr rtlCol="0" anchor="ctr"/>
+          <a:lstStyle/>
+          <a:p>
+            <a:pPr algn="ctr"/>
+          </a:p>
+        </p:txBody>
+      </p:sp>
+      <p:sp>
+        <p:nvSpPr>
+          <p:cNvPr id="9" name="Oval 8"/>
+          <p:cNvSpPr/>
+          <p:nvPr/>
+        </p:nvSpPr>
+        <p:spPr>
+          <a:xfrm>
+            <a:off x="11430000" y="4572000"/>
+            <a:ext cx="1371600" cy="1371600"/>
+          </a:xfrm>
+          <a:prstGeom prst="ellipse">
+            <a:avLst/>
+          </a:prstGeom>
+          <a:solidFill>
+            <a:srgbClr val="328C3C"/>
+          </a:solidFill>
+          <a:ln>
+            <a:noFill/>
+          </a:ln>
+        </p:spPr>
+        <p:style>
+          <a:lnRef idx="1">
+            <a:schemeClr val="accent1"/>
+          </a:lnRef>
+          <a:fillRef idx="3">
+            <a:schemeClr val="accent1"/>
+          </a:fillRef>
+          <a:effectRef idx="2">
+            <a:schemeClr val="accent1"/>
+          </a:effectRef>
+          <a:fontRef idx="minor">
+            <a:schemeClr val="lt1"/>
+          </a:fontRef>
+        </p:style>
+        <p:txBody>
+          <a:bodyPr rtlCol="0" anchor="ctr"/>
+          <a:lstStyle/>
+          <a:p>
+            <a:pPr algn="ctr"/>
+          </a:p>
+        </p:txBody>
+      </p:sp>
+      <p:sp>
+        <p:nvSpPr>
+          <p:cNvPr id="10" name="Rectangle 9"/>
+          <p:cNvSpPr/>
+          <p:nvPr/>
+        </p:nvSpPr>
+        <p:spPr>
+          <a:xfrm>
+            <a:off x="548640" y="731520"/>
+            <a:ext cx="109728" cy="4114800"/>
+          </a:xfrm>
+          <a:prstGeom prst="rect">
+            <a:avLst/>
+          </a:prstGeom>
+          <a:solidFill>
+            <a:srgbClr val="2E7D32"/>
+          </a:solidFill>
+          <a:ln>
+            <a:noFill/>
+          </a:ln>
+        </p:spPr>
+        <p:style>
+          <a:lnRef idx="1">
+            <a:schemeClr val="accent1"/>
+          </a:lnRef>
+          <a:fillRef idx="3">
+            <a:schemeClr val="accent1"/>
+          </a:fillRef>
+          <a:effectRef idx="2">
+            <a:schemeClr val="accent1"/>
+          </a:effectRef>
+          <a:fontRef idx="minor">
+            <a:schemeClr val="lt1"/>
+          </a:fontRef>
+        </p:style>
+        <p:txBody>
+          <a:bodyPr rtlCol="0" anchor="ctr"/>
+          <a:lstStyle/>
+          <a:p>
+            <a:pPr algn="ctr"/>
+          </a:p>
+        </p:txBody>
+      </p:sp>
+      <p:sp>
+        <p:nvSpPr>
+          <p:cNvPr id="11" name="Oval 10"/>
+          <p:cNvSpPr/>
+          <p:nvPr/>
+        </p:nvSpPr>
+        <p:spPr>
+          <a:xfrm>
+            <a:off x="9601200" y="457200"/>
+            <a:ext cx="2286000" cy="2286000"/>
+          </a:xfrm>
+          <a:prstGeom prst="ellipse">
+            <a:avLst/>
+          </a:prstGeom>
+          <a:solidFill>
+            <a:srgbClr val="2E7D32"/>
+          </a:solidFill>
+          <a:ln>
+            <a:noFill/>
+          </a:ln>
+        </p:spPr>
+        <p:style>
+          <a:lnRef idx="1">
+            <a:schemeClr val="accent1"/>
+          </a:lnRef>
+          <a:fillRef idx="3">
+            <a:schemeClr val="accent1"/>
+          </a:fillRef>
+          <a:effectRef idx="2">
+            <a:schemeClr val="accent1"/>
+          </a:effectRef>
+          <a:fontRef idx="minor">
+            <a:schemeClr val="lt1"/>
+          </a:fontRef>
+        </p:style>
+        <p:txBody>
+          <a:bodyPr rtlCol="0" anchor="ctr"/>
+          <a:lstStyle/>
+          <a:p>
+            <a:pPr algn="ctr"/>
+          </a:p>
+        </p:txBody>
+      </p:sp>
+      <p:sp>
+        <p:nvSpPr>
+          <p:cNvPr id="12" name="Oval 11"/>
+          <p:cNvSpPr/>
+          <p:nvPr/>
+        </p:nvSpPr>
+        <p:spPr>
+          <a:xfrm>
+            <a:off x="10241280" y="1097280"/>
+            <a:ext cx="1645920" cy="1645920"/>
+          </a:xfrm>
+          <a:prstGeom prst="ellipse">
+            <a:avLst/>
+          </a:prstGeom>
+          <a:solidFill>
+            <a:srgbClr val="328C3C"/>
+          </a:solidFill>
+          <a:ln>
+            <a:noFill/>
+          </a:ln>
+        </p:spPr>
+        <p:style>
+          <a:lnRef idx="1">
+            <a:schemeClr val="accent1"/>
+          </a:lnRef>
+          <a:fillRef idx="3">
+            <a:schemeClr val="accent1"/>
+          </a:fillRef>
+          <a:effectRef idx="2">
+            <a:schemeClr val="accent1"/>
+          </a:effectRef>
+          <a:fontRef idx="minor">
+            <a:schemeClr val="lt1"/>
+          </a:fontRef>
+        </p:style>
+        <p:txBody>
+          <a:bodyPr rtlCol="0" anchor="ctr"/>
+          <a:lstStyle/>
+          <a:p>
+            <a:pPr algn="ctr"/>
+          </a:p>
+        </p:txBody>
+      </p:sp>
+      <p:sp>
+        <p:nvSpPr>
+          <p:cNvPr id="13" name="Oval 12"/>
+          <p:cNvSpPr/>
+          <p:nvPr/>
+        </p:nvSpPr>
+        <p:spPr>
+          <a:xfrm>
+            <a:off x="9875520" y="1828800"/>
+            <a:ext cx="731520" cy="731520"/>
+          </a:xfrm>
+          <a:prstGeom prst="ellipse">
+            <a:avLst/>
+          </a:prstGeom>
+          <a:solidFill>
+            <a:srgbClr val="143719"/>
+          </a:solidFill>
+          <a:ln>
+            <a:noFill/>
+          </a:ln>
+        </p:spPr>
+        <p:style>
+          <a:lnRef idx="1">
+            <a:schemeClr val="accent1"/>
+          </a:lnRef>
+          <a:fillRef idx="3">
+            <a:schemeClr val="accent1"/>
+          </a:fillRef>
+          <a:effectRef idx="2">
+            <a:schemeClr val="accent1"/>
+          </a:effectRef>
+          <a:fontRef idx="minor">
+            <a:schemeClr val="lt1"/>
+          </a:fontRef>
+        </p:style>
+        <p:txBody>
+          <a:bodyPr rtlCol="0" anchor="ctr"/>
+          <a:lstStyle/>
+          <a:p>
+            <a:pPr algn="ctr"/>
+          </a:p>
+        </p:txBody>
+      </p:sp>
+      <p:sp>
+        <p:nvSpPr>
+          <p:cNvPr id="14" name="TextBox 13"/>
           <p:cNvSpPr txBox="1"/>
           <p:nvPr/>
         </p:nvSpPr>
         <p:spPr>
           <a:xfrm>
-            <a:off x="1188720" y="1645920"/>
-            <a:ext cx="9144000" cy="1097280"/>
+            <a:off x="1097280" y="914400"/>
+            <a:ext cx="7315200" cy="1371600"/>
           </a:xfrm>
           <a:prstGeom prst="rect">
             <a:avLst/>
@@ -3256,9 +3635,12 @@
           <a:lstStyle/>
           <a:p>
             <a:pPr algn="l">
-              <a:defRPr sz="4000" b="1">
+              <a:lnSpc>
+                <a:spcPts val="5200"/>
+              </a:lnSpc>
+              <a:defRPr sz="4400" b="1" i="0">
                 <a:solidFill>
-                  <a:srgbClr val="1B5E20"/>
+                  <a:srgbClr val="FFFFFF"/>
                 </a:solidFill>
                 <a:latin typeface="微软雅黑"/>
               </a:defRPr>
@@ -3271,14 +3653,14 @@
       </p:sp>
       <p:sp>
         <p:nvSpPr>
-          <p:cNvPr id="6" name="TextBox 5"/>
+          <p:cNvPr id="15" name="TextBox 14"/>
           <p:cNvSpPr txBox="1"/>
           <p:nvPr/>
         </p:nvSpPr>
         <p:spPr>
           <a:xfrm>
-            <a:off x="1188720" y="2926080"/>
-            <a:ext cx="9144000" cy="731520"/>
+            <a:off x="1097280" y="2286000"/>
+            <a:ext cx="7315200" cy="731520"/>
           </a:xfrm>
           <a:prstGeom prst="rect">
             <a:avLst/>
@@ -3292,7 +3674,10 @@
           <a:lstStyle/>
           <a:p>
             <a:pPr algn="l">
-              <a:defRPr sz="2400" b="0">
+              <a:lnSpc>
+                <a:spcPts val="3300"/>
+              </a:lnSpc>
+              <a:defRPr sz="2800" b="1" i="0">
                 <a:solidFill>
                   <a:srgbClr val="2E7D32"/>
                 </a:solidFill>
@@ -3300,21 +3685,21 @@
               </a:defRPr>
             </a:pPr>
             <a:r>
-              <a:t>水资源管理教学课件模板</a:t>
-            </a:r>
-          </a:p>
-        </p:txBody>
-      </p:sp>
-      <p:sp>
-        <p:nvSpPr>
-          <p:cNvPr id="7" name="TextBox 6"/>
+              <a:t>水资源管理教学课件</a:t>
+            </a:r>
+          </a:p>
+        </p:txBody>
+      </p:sp>
+      <p:sp>
+        <p:nvSpPr>
+          <p:cNvPr id="16" name="TextBox 15"/>
           <p:cNvSpPr txBox="1"/>
           <p:nvPr/>
         </p:nvSpPr>
         <p:spPr>
           <a:xfrm>
-            <a:off x="1188720" y="3840480"/>
-            <a:ext cx="9144000" cy="548640"/>
+            <a:off x="1097280" y="3108960"/>
+            <a:ext cx="7315200" cy="457200"/>
           </a:xfrm>
           <a:prstGeom prst="rect">
             <a:avLst/>
@@ -3328,29 +3713,75 @@
           <a:lstStyle/>
           <a:p>
             <a:pPr algn="l">
-              <a:defRPr sz="1400" b="0">
+              <a:lnSpc>
+                <a:spcPts val="1900"/>
+              </a:lnSpc>
+              <a:defRPr sz="1600" b="0" i="0">
                 <a:solidFill>
-                  <a:srgbClr val="6688AA"/>
+                  <a:srgbClr val="C8DCF0"/>
                 </a:solidFill>
                 <a:latin typeface="微软雅黑"/>
               </a:defRPr>
             </a:pPr>
             <a:r>
-              <a:t>模板：{{ template_name }} ｜ 课程类型：{{ 课程类型 }} ｜ 授课对象：{{ 授课对象 }}</a:t>
-            </a:r>
-          </a:p>
-        </p:txBody>
-      </p:sp>
-      <p:sp>
-        <p:nvSpPr>
-          <p:cNvPr id="8" name="TextBox 7"/>
+              <a:t>水资源管理 · 课程教学专用</a:t>
+            </a:r>
+          </a:p>
+        </p:txBody>
+      </p:sp>
+      <p:sp>
+        <p:nvSpPr>
+          <p:cNvPr id="17" name="Rectangle 16"/>
+          <p:cNvSpPr/>
+          <p:nvPr/>
+        </p:nvSpPr>
+        <p:spPr>
+          <a:xfrm>
+            <a:off x="0" y="5669280"/>
+            <a:ext cx="12191695" cy="54864"/>
+          </a:xfrm>
+          <a:prstGeom prst="rect">
+            <a:avLst/>
+          </a:prstGeom>
+          <a:solidFill>
+            <a:srgbClr val="2E7D32"/>
+          </a:solidFill>
+          <a:ln>
+            <a:noFill/>
+          </a:ln>
+        </p:spPr>
+        <p:style>
+          <a:lnRef idx="1">
+            <a:schemeClr val="accent1"/>
+          </a:lnRef>
+          <a:fillRef idx="3">
+            <a:schemeClr val="accent1"/>
+          </a:fillRef>
+          <a:effectRef idx="2">
+            <a:schemeClr val="accent1"/>
+          </a:effectRef>
+          <a:fontRef idx="minor">
+            <a:schemeClr val="lt1"/>
+          </a:fontRef>
+        </p:style>
+        <p:txBody>
+          <a:bodyPr rtlCol="0" anchor="ctr"/>
+          <a:lstStyle/>
+          <a:p>
+            <a:pPr algn="ctr"/>
+          </a:p>
+        </p:txBody>
+      </p:sp>
+      <p:sp>
+        <p:nvSpPr>
+          <p:cNvPr id="18" name="TextBox 17"/>
           <p:cNvSpPr txBox="1"/>
           <p:nvPr/>
         </p:nvSpPr>
         <p:spPr>
           <a:xfrm>
-            <a:off x="1188720" y="4572000"/>
-            <a:ext cx="9144000" cy="548640"/>
+            <a:off x="1097280" y="5943600"/>
+            <a:ext cx="10058400" cy="457200"/>
           </a:xfrm>
           <a:prstGeom prst="rect">
             <a:avLst/>
@@ -3364,15 +3795,57 @@
           <a:lstStyle/>
           <a:p>
             <a:pPr algn="l">
-              <a:defRPr sz="1400" b="0">
+              <a:lnSpc>
+                <a:spcPts val="1500"/>
+              </a:lnSpc>
+              <a:defRPr sz="1300" b="0" i="0">
                 <a:solidFill>
-                  <a:srgbClr val="6688AA"/>
+                  <a:srgbClr val="B4C8DC"/>
                 </a:solidFill>
                 <a:latin typeface="微软雅黑"/>
               </a:defRPr>
             </a:pPr>
             <a:r>
-              <a:t>总课时：{{ 总课时 }} ｜ 生成时间：{{ 生成时间 }}</a:t>
+              <a:t>模板：{{ template_name }}   ｜   课程类型：{{ 课程类型 }}   ｜   授课对象：{{ 授课对象 }}   ｜   总课时：{{ 总课时 }}</a:t>
+            </a:r>
+          </a:p>
+        </p:txBody>
+      </p:sp>
+      <p:sp>
+        <p:nvSpPr>
+          <p:cNvPr id="19" name="TextBox 18"/>
+          <p:cNvSpPr txBox="1"/>
+          <p:nvPr/>
+        </p:nvSpPr>
+        <p:spPr>
+          <a:xfrm>
+            <a:off x="1097280" y="6309360"/>
+            <a:ext cx="10058400" cy="457200"/>
+          </a:xfrm>
+          <a:prstGeom prst="rect">
+            <a:avLst/>
+          </a:prstGeom>
+          <a:noFill/>
+        </p:spPr>
+        <p:txBody>
+          <a:bodyPr wrap="square">
+            <a:spAutoFit/>
+          </a:bodyPr>
+          <a:lstStyle/>
+          <a:p>
+            <a:pPr algn="l">
+              <a:lnSpc>
+                <a:spcPts val="1500"/>
+              </a:lnSpc>
+              <a:defRPr sz="1300" b="0" i="0">
+                <a:solidFill>
+                  <a:srgbClr val="8CA5BE"/>
+                </a:solidFill>
+                <a:latin typeface="微软雅黑"/>
+              </a:defRPr>
+            </a:pPr>
+            <a:r>
+              <a:t>生成时间：{{ 生成时间 }}</a:t>
             </a:r>
           </a:p>
         </p:txBody>
@@ -3388,14 +3861,6 @@
 <file path=ppt/slides/slide2.xml><?xml version="1.0" encoding="utf-8"?>
 <p:sld xmlns:a="http://schemas.openxmlformats.org/drawingml/2006/main" xmlns:p="http://schemas.openxmlformats.org/presentationml/2006/main" xmlns:r="http://schemas.openxmlformats.org/officeDocument/2006/relationships">
   <p:cSld>
-    <p:bg>
-      <p:bgPr>
-        <a:solidFill>
-          <a:srgbClr val="FFFFFF"/>
-        </a:solidFill>
-        <a:effectLst/>
-      </p:bgPr>
-    </p:bg>
     <p:spTree>
       <p:nvGrpSpPr>
         <p:cNvPr id="1" name=""/>
@@ -3412,13 +3877,13 @@
         <p:spPr>
           <a:xfrm>
             <a:off x="0" y="0"/>
-            <a:ext cx="12191695" cy="73152"/>
-          </a:xfrm>
-          <a:prstGeom prst="rect">
-            <a:avLst/>
-          </a:prstGeom>
-          <a:solidFill>
-            <a:srgbClr val="2E7D32"/>
+            <a:ext cx="12191695" cy="6858000"/>
+          </a:xfrm>
+          <a:prstGeom prst="rect">
+            <a:avLst/>
+          </a:prstGeom>
+          <a:solidFill>
+            <a:srgbClr val="FFFFFF"/>
           </a:solidFill>
           <a:ln>
             <a:noFill/>
@@ -3448,50 +3913,14 @@
       </p:sp>
       <p:sp>
         <p:nvSpPr>
-          <p:cNvPr id="3" name="TextBox 2"/>
-          <p:cNvSpPr txBox="1"/>
-          <p:nvPr/>
-        </p:nvSpPr>
-        <p:spPr>
-          <a:xfrm>
-            <a:off x="731520" y="365760"/>
-            <a:ext cx="3657600" cy="731520"/>
-          </a:xfrm>
-          <a:prstGeom prst="rect">
-            <a:avLst/>
-          </a:prstGeom>
-          <a:noFill/>
-        </p:spPr>
-        <p:txBody>
-          <a:bodyPr wrap="square">
-            <a:spAutoFit/>
-          </a:bodyPr>
-          <a:lstStyle/>
-          <a:p>
-            <a:pPr algn="l">
-              <a:defRPr sz="3200" b="1">
-                <a:solidFill>
-                  <a:srgbClr val="1B5E20"/>
-                </a:solidFill>
-                <a:latin typeface="微软雅黑"/>
-              </a:defRPr>
-            </a:pPr>
-            <a:r>
-              <a:t>教学目标</a:t>
-            </a:r>
-          </a:p>
-        </p:txBody>
-      </p:sp>
-      <p:sp>
-        <p:nvSpPr>
-          <p:cNvPr id="4" name="Rectangle 3"/>
+          <p:cNvPr id="3" name="Rectangle 2"/>
           <p:cNvSpPr/>
           <p:nvPr/>
         </p:nvSpPr>
         <p:spPr>
           <a:xfrm>
-            <a:off x="731520" y="1097280"/>
-            <a:ext cx="2286000" cy="54864"/>
+            <a:off x="0" y="0"/>
+            <a:ext cx="12191695" cy="109728"/>
           </a:xfrm>
           <a:prstGeom prst="rect">
             <a:avLst/>
@@ -3527,14 +3956,100 @@
       </p:sp>
       <p:sp>
         <p:nvSpPr>
-          <p:cNvPr id="5" name="TextBox 4"/>
+          <p:cNvPr id="4" name="Rectangle 3"/>
+          <p:cNvSpPr/>
+          <p:nvPr/>
+        </p:nvSpPr>
+        <p:spPr>
+          <a:xfrm>
+            <a:off x="0" y="0"/>
+            <a:ext cx="548640" cy="6858000"/>
+          </a:xfrm>
+          <a:prstGeom prst="rect">
+            <a:avLst/>
+          </a:prstGeom>
+          <a:solidFill>
+            <a:srgbClr val="143719"/>
+          </a:solidFill>
+          <a:ln>
+            <a:noFill/>
+          </a:ln>
+        </p:spPr>
+        <p:style>
+          <a:lnRef idx="1">
+            <a:schemeClr val="accent1"/>
+          </a:lnRef>
+          <a:fillRef idx="3">
+            <a:schemeClr val="accent1"/>
+          </a:fillRef>
+          <a:effectRef idx="2">
+            <a:schemeClr val="accent1"/>
+          </a:effectRef>
+          <a:fontRef idx="minor">
+            <a:schemeClr val="lt1"/>
+          </a:fontRef>
+        </p:style>
+        <p:txBody>
+          <a:bodyPr rtlCol="0" anchor="ctr"/>
+          <a:lstStyle/>
+          <a:p>
+            <a:pPr algn="ctr"/>
+          </a:p>
+        </p:txBody>
+      </p:sp>
+      <p:sp>
+        <p:nvSpPr>
+          <p:cNvPr id="5" name="Rectangle 4"/>
+          <p:cNvSpPr/>
+          <p:nvPr/>
+        </p:nvSpPr>
+        <p:spPr>
+          <a:xfrm>
+            <a:off x="548640" y="731520"/>
+            <a:ext cx="4572000" cy="914400"/>
+          </a:xfrm>
+          <a:prstGeom prst="rect">
+            <a:avLst/>
+          </a:prstGeom>
+          <a:solidFill>
+            <a:srgbClr val="2E7D32"/>
+          </a:solidFill>
+          <a:ln>
+            <a:noFill/>
+          </a:ln>
+        </p:spPr>
+        <p:style>
+          <a:lnRef idx="1">
+            <a:schemeClr val="accent1"/>
+          </a:lnRef>
+          <a:fillRef idx="3">
+            <a:schemeClr val="accent1"/>
+          </a:fillRef>
+          <a:effectRef idx="2">
+            <a:schemeClr val="accent1"/>
+          </a:effectRef>
+          <a:fontRef idx="minor">
+            <a:schemeClr val="lt1"/>
+          </a:fontRef>
+        </p:style>
+        <p:txBody>
+          <a:bodyPr rtlCol="0" anchor="ctr"/>
+          <a:lstStyle/>
+          <a:p>
+            <a:pPr algn="ctr"/>
+          </a:p>
+        </p:txBody>
+      </p:sp>
+      <p:sp>
+        <p:nvSpPr>
+          <p:cNvPr id="6" name="TextBox 5"/>
           <p:cNvSpPr txBox="1"/>
           <p:nvPr/>
         </p:nvSpPr>
         <p:spPr>
           <a:xfrm>
-            <a:off x="731520" y="1463040"/>
-            <a:ext cx="10515600" cy="4572000"/>
+            <a:off x="731520" y="777240"/>
+            <a:ext cx="4114800" cy="822960"/>
           </a:xfrm>
           <a:prstGeom prst="rect">
             <a:avLst/>
@@ -3548,9 +4063,180 @@
           <a:lstStyle/>
           <a:p>
             <a:pPr algn="l">
-              <a:defRPr sz="1800" b="0">
+              <a:lnSpc>
+                <a:spcPts val="3600"/>
+              </a:lnSpc>
+              <a:defRPr sz="3000" b="1" i="0">
                 <a:solidFill>
-                  <a:srgbClr val="334455"/>
+                  <a:srgbClr val="FFFFFF"/>
+                </a:solidFill>
+                <a:latin typeface="微软雅黑"/>
+              </a:defRPr>
+            </a:pPr>
+            <a:r>
+              <a:t>📋 教学目标</a:t>
+            </a:r>
+          </a:p>
+        </p:txBody>
+      </p:sp>
+      <p:sp>
+        <p:nvSpPr>
+          <p:cNvPr id="7" name="Rectangle 6"/>
+          <p:cNvSpPr/>
+          <p:nvPr/>
+        </p:nvSpPr>
+        <p:spPr>
+          <a:xfrm>
+            <a:off x="548640" y="1828800"/>
+            <a:ext cx="2743200" cy="36576"/>
+          </a:xfrm>
+          <a:prstGeom prst="rect">
+            <a:avLst/>
+          </a:prstGeom>
+          <a:solidFill>
+            <a:srgbClr val="2E7D32"/>
+          </a:solidFill>
+          <a:ln>
+            <a:noFill/>
+          </a:ln>
+        </p:spPr>
+        <p:style>
+          <a:lnRef idx="1">
+            <a:schemeClr val="accent1"/>
+          </a:lnRef>
+          <a:fillRef idx="3">
+            <a:schemeClr val="accent1"/>
+          </a:fillRef>
+          <a:effectRef idx="2">
+            <a:schemeClr val="accent1"/>
+          </a:effectRef>
+          <a:fontRef idx="minor">
+            <a:schemeClr val="lt1"/>
+          </a:fontRef>
+        </p:style>
+        <p:txBody>
+          <a:bodyPr rtlCol="0" anchor="ctr"/>
+          <a:lstStyle/>
+          <a:p>
+            <a:pPr algn="ctr"/>
+          </a:p>
+        </p:txBody>
+      </p:sp>
+      <p:sp>
+        <p:nvSpPr>
+          <p:cNvPr id="8" name="Rounded Rectangle 7"/>
+          <p:cNvSpPr/>
+          <p:nvPr/>
+        </p:nvSpPr>
+        <p:spPr>
+          <a:xfrm>
+            <a:off x="731520" y="2103120"/>
+            <a:ext cx="10698480" cy="4114800"/>
+          </a:xfrm>
+          <a:prstGeom prst="roundRect">
+            <a:avLst/>
+          </a:prstGeom>
+          <a:solidFill>
+            <a:srgbClr val="F5F8FC"/>
+          </a:solidFill>
+          <a:ln>
+            <a:noFill/>
+          </a:ln>
+        </p:spPr>
+        <p:style>
+          <a:lnRef idx="1">
+            <a:schemeClr val="accent1"/>
+          </a:lnRef>
+          <a:fillRef idx="3">
+            <a:schemeClr val="accent1"/>
+          </a:fillRef>
+          <a:effectRef idx="2">
+            <a:schemeClr val="accent1"/>
+          </a:effectRef>
+          <a:fontRef idx="minor">
+            <a:schemeClr val="lt1"/>
+          </a:fontRef>
+        </p:style>
+        <p:txBody>
+          <a:bodyPr rtlCol="0" anchor="ctr"/>
+          <a:lstStyle/>
+          <a:p>
+            <a:pPr algn="ctr"/>
+          </a:p>
+        </p:txBody>
+      </p:sp>
+      <p:sp>
+        <p:nvSpPr>
+          <p:cNvPr id="9" name="Rectangle 8"/>
+          <p:cNvSpPr/>
+          <p:nvPr/>
+        </p:nvSpPr>
+        <p:spPr>
+          <a:xfrm>
+            <a:off x="731520" y="2103120"/>
+            <a:ext cx="91440" cy="4114800"/>
+          </a:xfrm>
+          <a:prstGeom prst="rect">
+            <a:avLst/>
+          </a:prstGeom>
+          <a:solidFill>
+            <a:srgbClr val="2E7D32"/>
+          </a:solidFill>
+          <a:ln>
+            <a:noFill/>
+          </a:ln>
+        </p:spPr>
+        <p:style>
+          <a:lnRef idx="1">
+            <a:schemeClr val="accent1"/>
+          </a:lnRef>
+          <a:fillRef idx="3">
+            <a:schemeClr val="accent1"/>
+          </a:fillRef>
+          <a:effectRef idx="2">
+            <a:schemeClr val="accent1"/>
+          </a:effectRef>
+          <a:fontRef idx="minor">
+            <a:schemeClr val="lt1"/>
+          </a:fontRef>
+        </p:style>
+        <p:txBody>
+          <a:bodyPr rtlCol="0" anchor="ctr"/>
+          <a:lstStyle/>
+          <a:p>
+            <a:pPr algn="ctr"/>
+          </a:p>
+        </p:txBody>
+      </p:sp>
+      <p:sp>
+        <p:nvSpPr>
+          <p:cNvPr id="10" name="TextBox 9"/>
+          <p:cNvSpPr txBox="1"/>
+          <p:nvPr/>
+        </p:nvSpPr>
+        <p:spPr>
+          <a:xfrm>
+            <a:off x="1097280" y="2377440"/>
+            <a:ext cx="10058400" cy="3657600"/>
+          </a:xfrm>
+          <a:prstGeom prst="rect">
+            <a:avLst/>
+          </a:prstGeom>
+          <a:noFill/>
+        </p:spPr>
+        <p:txBody>
+          <a:bodyPr wrap="square">
+            <a:spAutoFit/>
+          </a:bodyPr>
+          <a:lstStyle/>
+          <a:p>
+            <a:pPr algn="l">
+              <a:lnSpc>
+                <a:spcPts val="3200"/>
+              </a:lnSpc>
+              <a:defRPr sz="1800" b="0" i="0">
+                <a:solidFill>
+                  <a:srgbClr val="323C50"/>
                 </a:solidFill>
                 <a:latin typeface="微软雅黑"/>
               </a:defRPr>
@@ -3572,14 +4258,6 @@
 <file path=ppt/slides/slide3.xml><?xml version="1.0" encoding="utf-8"?>
 <p:sld xmlns:a="http://schemas.openxmlformats.org/drawingml/2006/main" xmlns:p="http://schemas.openxmlformats.org/presentationml/2006/main" xmlns:r="http://schemas.openxmlformats.org/officeDocument/2006/relationships">
   <p:cSld>
-    <p:bg>
-      <p:bgPr>
-        <a:solidFill>
-          <a:srgbClr val="FFFFFF"/>
-        </a:solidFill>
-        <a:effectLst/>
-      </p:bgPr>
-    </p:bg>
     <p:spTree>
       <p:nvGrpSpPr>
         <p:cNvPr id="1" name=""/>
@@ -3596,13 +4274,13 @@
         <p:spPr>
           <a:xfrm>
             <a:off x="0" y="0"/>
-            <a:ext cx="12191695" cy="73152"/>
-          </a:xfrm>
-          <a:prstGeom prst="rect">
-            <a:avLst/>
-          </a:prstGeom>
-          <a:solidFill>
-            <a:srgbClr val="2E7D32"/>
+            <a:ext cx="12191695" cy="6858000"/>
+          </a:xfrm>
+          <a:prstGeom prst="rect">
+            <a:avLst/>
+          </a:prstGeom>
+          <a:solidFill>
+            <a:srgbClr val="FFFFFF"/>
           </a:solidFill>
           <a:ln>
             <a:noFill/>
@@ -3632,50 +4310,14 @@
       </p:sp>
       <p:sp>
         <p:nvSpPr>
-          <p:cNvPr id="3" name="TextBox 2"/>
-          <p:cNvSpPr txBox="1"/>
-          <p:nvPr/>
-        </p:nvSpPr>
-        <p:spPr>
-          <a:xfrm>
-            <a:off x="731520" y="365760"/>
-            <a:ext cx="3657600" cy="731520"/>
-          </a:xfrm>
-          <a:prstGeom prst="rect">
-            <a:avLst/>
-          </a:prstGeom>
-          <a:noFill/>
-        </p:spPr>
-        <p:txBody>
-          <a:bodyPr wrap="square">
-            <a:spAutoFit/>
-          </a:bodyPr>
-          <a:lstStyle/>
-          <a:p>
-            <a:pPr algn="l">
-              <a:defRPr sz="3200" b="1">
-                <a:solidFill>
-                  <a:srgbClr val="1B5E20"/>
-                </a:solidFill>
-                <a:latin typeface="微软雅黑"/>
-              </a:defRPr>
-            </a:pPr>
-            <a:r>
-              <a:t>教学重难点</a:t>
-            </a:r>
-          </a:p>
-        </p:txBody>
-      </p:sp>
-      <p:sp>
-        <p:nvSpPr>
-          <p:cNvPr id="4" name="Rectangle 3"/>
+          <p:cNvPr id="3" name="Rectangle 2"/>
           <p:cNvSpPr/>
           <p:nvPr/>
         </p:nvSpPr>
         <p:spPr>
           <a:xfrm>
-            <a:off x="731520" y="1097280"/>
-            <a:ext cx="2286000" cy="54864"/>
+            <a:off x="0" y="0"/>
+            <a:ext cx="12191695" cy="109728"/>
           </a:xfrm>
           <a:prstGeom prst="rect">
             <a:avLst/>
@@ -3711,20 +4353,20 @@
       </p:sp>
       <p:sp>
         <p:nvSpPr>
-          <p:cNvPr id="5" name="Rounded Rectangle 4"/>
+          <p:cNvPr id="4" name="Rectangle 3"/>
           <p:cNvSpPr/>
           <p:nvPr/>
         </p:nvSpPr>
         <p:spPr>
           <a:xfrm>
-            <a:off x="731520" y="1645920"/>
-            <a:ext cx="5029200" cy="4114800"/>
-          </a:xfrm>
-          <a:prstGeom prst="roundRect">
-            <a:avLst/>
-          </a:prstGeom>
-          <a:solidFill>
-            <a:srgbClr val="F0F8FF"/>
+            <a:off x="0" y="0"/>
+            <a:ext cx="548640" cy="6858000"/>
+          </a:xfrm>
+          <a:prstGeom prst="rect">
+            <a:avLst/>
+          </a:prstGeom>
+          <a:solidFill>
+            <a:srgbClr val="143719"/>
           </a:solidFill>
           <a:ln>
             <a:noFill/>
@@ -3754,92 +4396,20 @@
       </p:sp>
       <p:sp>
         <p:nvSpPr>
-          <p:cNvPr id="6" name="TextBox 5"/>
-          <p:cNvSpPr txBox="1"/>
-          <p:nvPr/>
-        </p:nvSpPr>
-        <p:spPr>
-          <a:xfrm>
-            <a:off x="1097280" y="1828800"/>
-            <a:ext cx="4389120" cy="548640"/>
-          </a:xfrm>
-          <a:prstGeom prst="rect">
-            <a:avLst/>
-          </a:prstGeom>
-          <a:noFill/>
-        </p:spPr>
-        <p:txBody>
-          <a:bodyPr wrap="square">
-            <a:spAutoFit/>
-          </a:bodyPr>
-          <a:lstStyle/>
-          <a:p>
-            <a:pPr algn="l">
-              <a:defRPr sz="2200" b="1">
-                <a:solidFill>
-                  <a:srgbClr val="2E7D32"/>
-                </a:solidFill>
-                <a:latin typeface="微软雅黑"/>
-              </a:defRPr>
-            </a:pPr>
-            <a:r>
-              <a:t>教学重点</a:t>
-            </a:r>
-          </a:p>
-        </p:txBody>
-      </p:sp>
-      <p:sp>
-        <p:nvSpPr>
-          <p:cNvPr id="7" name="TextBox 6"/>
-          <p:cNvSpPr txBox="1"/>
-          <p:nvPr/>
-        </p:nvSpPr>
-        <p:spPr>
-          <a:xfrm>
-            <a:off x="1097280" y="2468880"/>
-            <a:ext cx="4389120" cy="2926080"/>
-          </a:xfrm>
-          <a:prstGeom prst="rect">
-            <a:avLst/>
-          </a:prstGeom>
-          <a:noFill/>
-        </p:spPr>
-        <p:txBody>
-          <a:bodyPr wrap="square">
-            <a:spAutoFit/>
-          </a:bodyPr>
-          <a:lstStyle/>
-          <a:p>
-            <a:pPr algn="l">
-              <a:defRPr sz="1600" b="0">
-                <a:solidFill>
-                  <a:srgbClr val="334455"/>
-                </a:solidFill>
-                <a:latin typeface="微软雅黑"/>
-              </a:defRPr>
-            </a:pPr>
-            <a:r>
-              <a:t>{{ 教学重点 }}</a:t>
-            </a:r>
-          </a:p>
-        </p:txBody>
-      </p:sp>
-      <p:sp>
-        <p:nvSpPr>
-          <p:cNvPr id="8" name="Rounded Rectangle 7"/>
+          <p:cNvPr id="5" name="Rectangle 4"/>
           <p:cNvSpPr/>
           <p:nvPr/>
         </p:nvSpPr>
         <p:spPr>
           <a:xfrm>
-            <a:off x="6400800" y="1645920"/>
-            <a:ext cx="5029200" cy="4114800"/>
-          </a:xfrm>
-          <a:prstGeom prst="roundRect">
-            <a:avLst/>
-          </a:prstGeom>
-          <a:solidFill>
-            <a:srgbClr val="FFF8F0"/>
+            <a:off x="548640" y="731520"/>
+            <a:ext cx="4572000" cy="914400"/>
+          </a:xfrm>
+          <a:prstGeom prst="rect">
+            <a:avLst/>
+          </a:prstGeom>
+          <a:solidFill>
+            <a:srgbClr val="2E7D32"/>
           </a:solidFill>
           <a:ln>
             <a:noFill/>
@@ -3869,14 +4439,14 @@
       </p:sp>
       <p:sp>
         <p:nvSpPr>
-          <p:cNvPr id="9" name="TextBox 8"/>
+          <p:cNvPr id="6" name="TextBox 5"/>
           <p:cNvSpPr txBox="1"/>
           <p:nvPr/>
         </p:nvSpPr>
         <p:spPr>
           <a:xfrm>
-            <a:off x="6766560" y="1828800"/>
-            <a:ext cx="4389120" cy="548640"/>
+            <a:off x="731520" y="777240"/>
+            <a:ext cx="4114800" cy="822960"/>
           </a:xfrm>
           <a:prstGeom prst="rect">
             <a:avLst/>
@@ -3890,16 +4460,148 @@
           <a:lstStyle/>
           <a:p>
             <a:pPr algn="l">
-              <a:defRPr sz="2200" b="1">
+              <a:lnSpc>
+                <a:spcPts val="3600"/>
+              </a:lnSpc>
+              <a:defRPr sz="3000" b="1" i="0">
                 <a:solidFill>
-                  <a:srgbClr val="CC6600"/>
+                  <a:srgbClr val="FFFFFF"/>
                 </a:solidFill>
                 <a:latin typeface="微软雅黑"/>
               </a:defRPr>
             </a:pPr>
             <a:r>
-              <a:t>教学难点</a:t>
-            </a:r>
+              <a:t>🎯 教学重难点</a:t>
+            </a:r>
+          </a:p>
+        </p:txBody>
+      </p:sp>
+      <p:sp>
+        <p:nvSpPr>
+          <p:cNvPr id="7" name="Rectangle 6"/>
+          <p:cNvSpPr/>
+          <p:nvPr/>
+        </p:nvSpPr>
+        <p:spPr>
+          <a:xfrm>
+            <a:off x="548640" y="1828800"/>
+            <a:ext cx="2743200" cy="36576"/>
+          </a:xfrm>
+          <a:prstGeom prst="rect">
+            <a:avLst/>
+          </a:prstGeom>
+          <a:solidFill>
+            <a:srgbClr val="2E7D32"/>
+          </a:solidFill>
+          <a:ln>
+            <a:noFill/>
+          </a:ln>
+        </p:spPr>
+        <p:style>
+          <a:lnRef idx="1">
+            <a:schemeClr val="accent1"/>
+          </a:lnRef>
+          <a:fillRef idx="3">
+            <a:schemeClr val="accent1"/>
+          </a:fillRef>
+          <a:effectRef idx="2">
+            <a:schemeClr val="accent1"/>
+          </a:effectRef>
+          <a:fontRef idx="minor">
+            <a:schemeClr val="lt1"/>
+          </a:fontRef>
+        </p:style>
+        <p:txBody>
+          <a:bodyPr rtlCol="0" anchor="ctr"/>
+          <a:lstStyle/>
+          <a:p>
+            <a:pPr algn="ctr"/>
+          </a:p>
+        </p:txBody>
+      </p:sp>
+      <p:sp>
+        <p:nvSpPr>
+          <p:cNvPr id="8" name="Rounded Rectangle 7"/>
+          <p:cNvSpPr/>
+          <p:nvPr/>
+        </p:nvSpPr>
+        <p:spPr>
+          <a:xfrm>
+            <a:off x="731520" y="2103120"/>
+            <a:ext cx="5120640" cy="4114800"/>
+          </a:xfrm>
+          <a:prstGeom prst="roundRect">
+            <a:avLst/>
+          </a:prstGeom>
+          <a:solidFill>
+            <a:srgbClr val="E6F5FF"/>
+          </a:solidFill>
+          <a:ln>
+            <a:noFill/>
+          </a:ln>
+        </p:spPr>
+        <p:style>
+          <a:lnRef idx="1">
+            <a:schemeClr val="accent1"/>
+          </a:lnRef>
+          <a:fillRef idx="3">
+            <a:schemeClr val="accent1"/>
+          </a:fillRef>
+          <a:effectRef idx="2">
+            <a:schemeClr val="accent1"/>
+          </a:effectRef>
+          <a:fontRef idx="minor">
+            <a:schemeClr val="lt1"/>
+          </a:fontRef>
+        </p:style>
+        <p:txBody>
+          <a:bodyPr rtlCol="0" anchor="ctr"/>
+          <a:lstStyle/>
+          <a:p>
+            <a:pPr algn="ctr"/>
+          </a:p>
+        </p:txBody>
+      </p:sp>
+      <p:sp>
+        <p:nvSpPr>
+          <p:cNvPr id="9" name="Rectangle 8"/>
+          <p:cNvSpPr/>
+          <p:nvPr/>
+        </p:nvSpPr>
+        <p:spPr>
+          <a:xfrm>
+            <a:off x="731520" y="2103120"/>
+            <a:ext cx="5120640" cy="640080"/>
+          </a:xfrm>
+          <a:prstGeom prst="rect">
+            <a:avLst/>
+          </a:prstGeom>
+          <a:solidFill>
+            <a:srgbClr val="2E7D32"/>
+          </a:solidFill>
+          <a:ln>
+            <a:noFill/>
+          </a:ln>
+        </p:spPr>
+        <p:style>
+          <a:lnRef idx="1">
+            <a:schemeClr val="accent1"/>
+          </a:lnRef>
+          <a:fillRef idx="3">
+            <a:schemeClr val="accent1"/>
+          </a:fillRef>
+          <a:effectRef idx="2">
+            <a:schemeClr val="accent1"/>
+          </a:effectRef>
+          <a:fontRef idx="minor">
+            <a:schemeClr val="lt1"/>
+          </a:fontRef>
+        </p:style>
+        <p:txBody>
+          <a:bodyPr rtlCol="0" anchor="ctr"/>
+          <a:lstStyle/>
+          <a:p>
+            <a:pPr algn="ctr"/>
           </a:p>
         </p:txBody>
       </p:sp>
@@ -3911,8 +4613,8 @@
         </p:nvSpPr>
         <p:spPr>
           <a:xfrm>
-            <a:off x="6766560" y="2468880"/>
-            <a:ext cx="4389120" cy="2926080"/>
+            <a:off x="1005840" y="2148840"/>
+            <a:ext cx="4572000" cy="548640"/>
           </a:xfrm>
           <a:prstGeom prst="rect">
             <a:avLst/>
@@ -3926,9 +4628,215 @@
           <a:lstStyle/>
           <a:p>
             <a:pPr algn="l">
-              <a:defRPr sz="1600" b="0">
+              <a:lnSpc>
+                <a:spcPts val="2400"/>
+              </a:lnSpc>
+              <a:defRPr sz="2000" b="1" i="0">
                 <a:solidFill>
-                  <a:srgbClr val="334455"/>
+                  <a:srgbClr val="FFFFFF"/>
+                </a:solidFill>
+                <a:latin typeface="微软雅黑"/>
+              </a:defRPr>
+            </a:pPr>
+            <a:r>
+              <a:t>⭐ 教学重点</a:t>
+            </a:r>
+          </a:p>
+        </p:txBody>
+      </p:sp>
+      <p:sp>
+        <p:nvSpPr>
+          <p:cNvPr id="11" name="TextBox 10"/>
+          <p:cNvSpPr txBox="1"/>
+          <p:nvPr/>
+        </p:nvSpPr>
+        <p:spPr>
+          <a:xfrm>
+            <a:off x="1005840" y="2926080"/>
+            <a:ext cx="4572000" cy="2926080"/>
+          </a:xfrm>
+          <a:prstGeom prst="rect">
+            <a:avLst/>
+          </a:prstGeom>
+          <a:noFill/>
+        </p:spPr>
+        <p:txBody>
+          <a:bodyPr wrap="square">
+            <a:spAutoFit/>
+          </a:bodyPr>
+          <a:lstStyle/>
+          <a:p>
+            <a:pPr algn="l">
+              <a:lnSpc>
+                <a:spcPts val="2800"/>
+              </a:lnSpc>
+              <a:defRPr sz="1600" b="0" i="0">
+                <a:solidFill>
+                  <a:srgbClr val="283C5A"/>
+                </a:solidFill>
+                <a:latin typeface="微软雅黑"/>
+              </a:defRPr>
+            </a:pPr>
+            <a:r>
+              <a:t>{{ 教学重点 }}</a:t>
+            </a:r>
+          </a:p>
+        </p:txBody>
+      </p:sp>
+      <p:sp>
+        <p:nvSpPr>
+          <p:cNvPr id="12" name="Rounded Rectangle 11"/>
+          <p:cNvSpPr/>
+          <p:nvPr/>
+        </p:nvSpPr>
+        <p:spPr>
+          <a:xfrm>
+            <a:off x="6126480" y="2103120"/>
+            <a:ext cx="5303520" cy="4114800"/>
+          </a:xfrm>
+          <a:prstGeom prst="roundRect">
+            <a:avLst/>
+          </a:prstGeom>
+          <a:solidFill>
+            <a:srgbClr val="FFF5E6"/>
+          </a:solidFill>
+          <a:ln>
+            <a:noFill/>
+          </a:ln>
+        </p:spPr>
+        <p:style>
+          <a:lnRef idx="1">
+            <a:schemeClr val="accent1"/>
+          </a:lnRef>
+          <a:fillRef idx="3">
+            <a:schemeClr val="accent1"/>
+          </a:fillRef>
+          <a:effectRef idx="2">
+            <a:schemeClr val="accent1"/>
+          </a:effectRef>
+          <a:fontRef idx="minor">
+            <a:schemeClr val="lt1"/>
+          </a:fontRef>
+        </p:style>
+        <p:txBody>
+          <a:bodyPr rtlCol="0" anchor="ctr"/>
+          <a:lstStyle/>
+          <a:p>
+            <a:pPr algn="ctr"/>
+          </a:p>
+        </p:txBody>
+      </p:sp>
+      <p:sp>
+        <p:nvSpPr>
+          <p:cNvPr id="13" name="Rectangle 12"/>
+          <p:cNvSpPr/>
+          <p:nvPr/>
+        </p:nvSpPr>
+        <p:spPr>
+          <a:xfrm>
+            <a:off x="6126480" y="2103120"/>
+            <a:ext cx="5303520" cy="640080"/>
+          </a:xfrm>
+          <a:prstGeom prst="rect">
+            <a:avLst/>
+          </a:prstGeom>
+          <a:solidFill>
+            <a:srgbClr val="C87828"/>
+          </a:solidFill>
+          <a:ln>
+            <a:noFill/>
+          </a:ln>
+        </p:spPr>
+        <p:style>
+          <a:lnRef idx="1">
+            <a:schemeClr val="accent1"/>
+          </a:lnRef>
+          <a:fillRef idx="3">
+            <a:schemeClr val="accent1"/>
+          </a:fillRef>
+          <a:effectRef idx="2">
+            <a:schemeClr val="accent1"/>
+          </a:effectRef>
+          <a:fontRef idx="minor">
+            <a:schemeClr val="lt1"/>
+          </a:fontRef>
+        </p:style>
+        <p:txBody>
+          <a:bodyPr rtlCol="0" anchor="ctr"/>
+          <a:lstStyle/>
+          <a:p>
+            <a:pPr algn="ctr"/>
+          </a:p>
+        </p:txBody>
+      </p:sp>
+      <p:sp>
+        <p:nvSpPr>
+          <p:cNvPr id="14" name="TextBox 13"/>
+          <p:cNvSpPr txBox="1"/>
+          <p:nvPr/>
+        </p:nvSpPr>
+        <p:spPr>
+          <a:xfrm>
+            <a:off x="6400800" y="2148840"/>
+            <a:ext cx="4754880" cy="548640"/>
+          </a:xfrm>
+          <a:prstGeom prst="rect">
+            <a:avLst/>
+          </a:prstGeom>
+          <a:noFill/>
+        </p:spPr>
+        <p:txBody>
+          <a:bodyPr wrap="square">
+            <a:spAutoFit/>
+          </a:bodyPr>
+          <a:lstStyle/>
+          <a:p>
+            <a:pPr algn="l">
+              <a:lnSpc>
+                <a:spcPts val="2400"/>
+              </a:lnSpc>
+              <a:defRPr sz="2000" b="1" i="0">
+                <a:solidFill>
+                  <a:srgbClr val="FFFFFF"/>
+                </a:solidFill>
+                <a:latin typeface="微软雅黑"/>
+              </a:defRPr>
+            </a:pPr>
+            <a:r>
+              <a:t>⚠️ 教学难点</a:t>
+            </a:r>
+          </a:p>
+        </p:txBody>
+      </p:sp>
+      <p:sp>
+        <p:nvSpPr>
+          <p:cNvPr id="15" name="TextBox 14"/>
+          <p:cNvSpPr txBox="1"/>
+          <p:nvPr/>
+        </p:nvSpPr>
+        <p:spPr>
+          <a:xfrm>
+            <a:off x="6400800" y="2926080"/>
+            <a:ext cx="4754880" cy="2926080"/>
+          </a:xfrm>
+          <a:prstGeom prst="rect">
+            <a:avLst/>
+          </a:prstGeom>
+          <a:noFill/>
+        </p:spPr>
+        <p:txBody>
+          <a:bodyPr wrap="square">
+            <a:spAutoFit/>
+          </a:bodyPr>
+          <a:lstStyle/>
+          <a:p>
+            <a:pPr algn="l">
+              <a:lnSpc>
+                <a:spcPts val="2800"/>
+              </a:lnSpc>
+              <a:defRPr sz="1600" b="0" i="0">
+                <a:solidFill>
+                  <a:srgbClr val="503214"/>
                 </a:solidFill>
                 <a:latin typeface="微软雅黑"/>
               </a:defRPr>
@@ -3950,14 +4858,6 @@
 <file path=ppt/slides/slide4.xml><?xml version="1.0" encoding="utf-8"?>
 <p:sld xmlns:a="http://schemas.openxmlformats.org/drawingml/2006/main" xmlns:p="http://schemas.openxmlformats.org/presentationml/2006/main" xmlns:r="http://schemas.openxmlformats.org/officeDocument/2006/relationships">
   <p:cSld>
-    <p:bg>
-      <p:bgPr>
-        <a:solidFill>
-          <a:srgbClr val="FFFFFF"/>
-        </a:solidFill>
-        <a:effectLst/>
-      </p:bgPr>
-    </p:bg>
     <p:spTree>
       <p:nvGrpSpPr>
         <p:cNvPr id="1" name=""/>
@@ -3974,13 +4874,13 @@
         <p:spPr>
           <a:xfrm>
             <a:off x="0" y="0"/>
-            <a:ext cx="12191695" cy="73152"/>
-          </a:xfrm>
-          <a:prstGeom prst="rect">
-            <a:avLst/>
-          </a:prstGeom>
-          <a:solidFill>
-            <a:srgbClr val="2E7D32"/>
+            <a:ext cx="12191695" cy="6858000"/>
+          </a:xfrm>
+          <a:prstGeom prst="rect">
+            <a:avLst/>
+          </a:prstGeom>
+          <a:solidFill>
+            <a:srgbClr val="FFFFFF"/>
           </a:solidFill>
           <a:ln>
             <a:noFill/>
@@ -4010,50 +4910,14 @@
       </p:sp>
       <p:sp>
         <p:nvSpPr>
-          <p:cNvPr id="3" name="TextBox 2"/>
-          <p:cNvSpPr txBox="1"/>
-          <p:nvPr/>
-        </p:nvSpPr>
-        <p:spPr>
-          <a:xfrm>
-            <a:off x="731520" y="365760"/>
-            <a:ext cx="3657600" cy="731520"/>
-          </a:xfrm>
-          <a:prstGeom prst="rect">
-            <a:avLst/>
-          </a:prstGeom>
-          <a:noFill/>
-        </p:spPr>
-        <p:txBody>
-          <a:bodyPr wrap="square">
-            <a:spAutoFit/>
-          </a:bodyPr>
-          <a:lstStyle/>
-          <a:p>
-            <a:pPr algn="l">
-              <a:defRPr sz="3200" b="1">
-                <a:solidFill>
-                  <a:srgbClr val="1B5E20"/>
-                </a:solidFill>
-                <a:latin typeface="微软雅黑"/>
-              </a:defRPr>
-            </a:pPr>
-            <a:r>
-              <a:t>{{ 环节1标题 }}</a:t>
-            </a:r>
-          </a:p>
-        </p:txBody>
-      </p:sp>
-      <p:sp>
-        <p:nvSpPr>
-          <p:cNvPr id="4" name="Rectangle 3"/>
+          <p:cNvPr id="3" name="Rectangle 2"/>
           <p:cNvSpPr/>
           <p:nvPr/>
         </p:nvSpPr>
         <p:spPr>
           <a:xfrm>
-            <a:off x="731520" y="1097280"/>
-            <a:ext cx="2286000" cy="54864"/>
+            <a:off x="0" y="0"/>
+            <a:ext cx="12191695" cy="109728"/>
           </a:xfrm>
           <a:prstGeom prst="rect">
             <a:avLst/>
@@ -4089,14 +4953,100 @@
       </p:sp>
       <p:sp>
         <p:nvSpPr>
-          <p:cNvPr id="5" name="TextBox 4"/>
+          <p:cNvPr id="4" name="Rectangle 3"/>
+          <p:cNvSpPr/>
+          <p:nvPr/>
+        </p:nvSpPr>
+        <p:spPr>
+          <a:xfrm>
+            <a:off x="0" y="0"/>
+            <a:ext cx="548640" cy="6858000"/>
+          </a:xfrm>
+          <a:prstGeom prst="rect">
+            <a:avLst/>
+          </a:prstGeom>
+          <a:solidFill>
+            <a:srgbClr val="143719"/>
+          </a:solidFill>
+          <a:ln>
+            <a:noFill/>
+          </a:ln>
+        </p:spPr>
+        <p:style>
+          <a:lnRef idx="1">
+            <a:schemeClr val="accent1"/>
+          </a:lnRef>
+          <a:fillRef idx="3">
+            <a:schemeClr val="accent1"/>
+          </a:fillRef>
+          <a:effectRef idx="2">
+            <a:schemeClr val="accent1"/>
+          </a:effectRef>
+          <a:fontRef idx="minor">
+            <a:schemeClr val="lt1"/>
+          </a:fontRef>
+        </p:style>
+        <p:txBody>
+          <a:bodyPr rtlCol="0" anchor="ctr"/>
+          <a:lstStyle/>
+          <a:p>
+            <a:pPr algn="ctr"/>
+          </a:p>
+        </p:txBody>
+      </p:sp>
+      <p:sp>
+        <p:nvSpPr>
+          <p:cNvPr id="5" name="Oval 4"/>
+          <p:cNvSpPr/>
+          <p:nvPr/>
+        </p:nvSpPr>
+        <p:spPr>
+          <a:xfrm>
+            <a:off x="731520" y="548640"/>
+            <a:ext cx="914400" cy="914400"/>
+          </a:xfrm>
+          <a:prstGeom prst="ellipse">
+            <a:avLst/>
+          </a:prstGeom>
+          <a:solidFill>
+            <a:srgbClr val="2E7D32"/>
+          </a:solidFill>
+          <a:ln>
+            <a:noFill/>
+          </a:ln>
+        </p:spPr>
+        <p:style>
+          <a:lnRef idx="1">
+            <a:schemeClr val="accent1"/>
+          </a:lnRef>
+          <a:fillRef idx="3">
+            <a:schemeClr val="accent1"/>
+          </a:fillRef>
+          <a:effectRef idx="2">
+            <a:schemeClr val="accent1"/>
+          </a:effectRef>
+          <a:fontRef idx="minor">
+            <a:schemeClr val="lt1"/>
+          </a:fontRef>
+        </p:style>
+        <p:txBody>
+          <a:bodyPr rtlCol="0" anchor="ctr"/>
+          <a:lstStyle/>
+          <a:p>
+            <a:pPr algn="ctr"/>
+          </a:p>
+        </p:txBody>
+      </p:sp>
+      <p:sp>
+        <p:nvSpPr>
+          <p:cNvPr id="6" name="TextBox 5"/>
           <p:cNvSpPr txBox="1"/>
           <p:nvPr/>
         </p:nvSpPr>
         <p:spPr>
           <a:xfrm>
-            <a:off x="731520" y="1463040"/>
-            <a:ext cx="10515600" cy="457200"/>
+            <a:off x="731520" y="594360"/>
+            <a:ext cx="914400" cy="822960"/>
           </a:xfrm>
           <a:prstGeom prst="rect">
             <a:avLst/>
@@ -4109,30 +5059,33 @@
           </a:bodyPr>
           <a:lstStyle/>
           <a:p>
-            <a:pPr algn="l">
-              <a:defRPr sz="1600" b="0">
+            <a:pPr algn="ctr">
+              <a:lnSpc>
+                <a:spcPts val="4300"/>
+              </a:lnSpc>
+              <a:defRPr sz="3600" b="1" i="0">
                 <a:solidFill>
-                  <a:srgbClr val="888888"/>
+                  <a:srgbClr val="FFFFFF"/>
                 </a:solidFill>
                 <a:latin typeface="微软雅黑"/>
               </a:defRPr>
             </a:pPr>
             <a:r>
-              <a:t>时长：{{ 环节1时长 }}</a:t>
-            </a:r>
-          </a:p>
-        </p:txBody>
-      </p:sp>
-      <p:sp>
-        <p:nvSpPr>
-          <p:cNvPr id="6" name="TextBox 5"/>
+              <a:t>1</a:t>
+            </a:r>
+          </a:p>
+        </p:txBody>
+      </p:sp>
+      <p:sp>
+        <p:nvSpPr>
+          <p:cNvPr id="7" name="TextBox 6"/>
           <p:cNvSpPr txBox="1"/>
           <p:nvPr/>
         </p:nvSpPr>
         <p:spPr>
           <a:xfrm>
-            <a:off x="731520" y="2011680"/>
-            <a:ext cx="10515600" cy="1097280"/>
+            <a:off x="1828800" y="640080"/>
+            <a:ext cx="7315200" cy="731520"/>
           </a:xfrm>
           <a:prstGeom prst="rect">
             <a:avLst/>
@@ -4146,7 +5099,299 @@
           <a:lstStyle/>
           <a:p>
             <a:pPr algn="l">
-              <a:defRPr sz="2000" b="1">
+              <a:lnSpc>
+                <a:spcPts val="3600"/>
+              </a:lnSpc>
+              <a:defRPr sz="3000" b="1" i="0">
+                <a:solidFill>
+                  <a:srgbClr val="143719"/>
+                </a:solidFill>
+                <a:latin typeface="微软雅黑"/>
+              </a:defRPr>
+            </a:pPr>
+            <a:r>
+              <a:t>{{ 环节1标题 }}</a:t>
+            </a:r>
+          </a:p>
+        </p:txBody>
+      </p:sp>
+      <p:sp>
+        <p:nvSpPr>
+          <p:cNvPr id="8" name="Rounded Rectangle 7"/>
+          <p:cNvSpPr/>
+          <p:nvPr/>
+        </p:nvSpPr>
+        <p:spPr>
+          <a:xfrm>
+            <a:off x="9601200" y="731520"/>
+            <a:ext cx="2286000" cy="548640"/>
+          </a:xfrm>
+          <a:prstGeom prst="roundRect">
+            <a:avLst/>
+          </a:prstGeom>
+          <a:solidFill>
+            <a:srgbClr val="328C3C"/>
+          </a:solidFill>
+          <a:ln>
+            <a:noFill/>
+          </a:ln>
+        </p:spPr>
+        <p:style>
+          <a:lnRef idx="1">
+            <a:schemeClr val="accent1"/>
+          </a:lnRef>
+          <a:fillRef idx="3">
+            <a:schemeClr val="accent1"/>
+          </a:fillRef>
+          <a:effectRef idx="2">
+            <a:schemeClr val="accent1"/>
+          </a:effectRef>
+          <a:fontRef idx="minor">
+            <a:schemeClr val="lt1"/>
+          </a:fontRef>
+        </p:style>
+        <p:txBody>
+          <a:bodyPr rtlCol="0" anchor="ctr"/>
+          <a:lstStyle/>
+          <a:p>
+            <a:pPr algn="ctr"/>
+          </a:p>
+        </p:txBody>
+      </p:sp>
+      <p:sp>
+        <p:nvSpPr>
+          <p:cNvPr id="9" name="TextBox 8"/>
+          <p:cNvSpPr txBox="1"/>
+          <p:nvPr/>
+        </p:nvSpPr>
+        <p:spPr>
+          <a:xfrm>
+            <a:off x="9601200" y="749808"/>
+            <a:ext cx="2286000" cy="502920"/>
+          </a:xfrm>
+          <a:prstGeom prst="rect">
+            <a:avLst/>
+          </a:prstGeom>
+          <a:noFill/>
+        </p:spPr>
+        <p:txBody>
+          <a:bodyPr wrap="square">
+            <a:spAutoFit/>
+          </a:bodyPr>
+          <a:lstStyle/>
+          <a:p>
+            <a:pPr algn="ctr">
+              <a:lnSpc>
+                <a:spcPts val="1600"/>
+              </a:lnSpc>
+              <a:defRPr sz="1400" b="1" i="0">
+                <a:solidFill>
+                  <a:srgbClr val="143719"/>
+                </a:solidFill>
+                <a:latin typeface="微软雅黑"/>
+              </a:defRPr>
+            </a:pPr>
+            <a:r>
+              <a:t>⏱ { 环节1时长 }</a:t>
+            </a:r>
+          </a:p>
+        </p:txBody>
+      </p:sp>
+      <p:sp>
+        <p:nvSpPr>
+          <p:cNvPr id="10" name="Rectangle 9"/>
+          <p:cNvSpPr/>
+          <p:nvPr/>
+        </p:nvSpPr>
+        <p:spPr>
+          <a:xfrm>
+            <a:off x="1828800" y="1463040"/>
+            <a:ext cx="3657600" cy="36576"/>
+          </a:xfrm>
+          <a:prstGeom prst="rect">
+            <a:avLst/>
+          </a:prstGeom>
+          <a:solidFill>
+            <a:srgbClr val="2E7D32"/>
+          </a:solidFill>
+          <a:ln>
+            <a:noFill/>
+          </a:ln>
+        </p:spPr>
+        <p:style>
+          <a:lnRef idx="1">
+            <a:schemeClr val="accent1"/>
+          </a:lnRef>
+          <a:fillRef idx="3">
+            <a:schemeClr val="accent1"/>
+          </a:fillRef>
+          <a:effectRef idx="2">
+            <a:schemeClr val="accent1"/>
+          </a:effectRef>
+          <a:fontRef idx="minor">
+            <a:schemeClr val="lt1"/>
+          </a:fontRef>
+        </p:style>
+        <p:txBody>
+          <a:bodyPr rtlCol="0" anchor="ctr"/>
+          <a:lstStyle/>
+          <a:p>
+            <a:pPr algn="ctr"/>
+          </a:p>
+        </p:txBody>
+      </p:sp>
+      <p:sp>
+        <p:nvSpPr>
+          <p:cNvPr id="11" name="Rounded Rectangle 10"/>
+          <p:cNvSpPr/>
+          <p:nvPr/>
+        </p:nvSpPr>
+        <p:spPr>
+          <a:xfrm>
+            <a:off x="731520" y="1828800"/>
+            <a:ext cx="10698480" cy="2011680"/>
+          </a:xfrm>
+          <a:prstGeom prst="roundRect">
+            <a:avLst/>
+          </a:prstGeom>
+          <a:solidFill>
+            <a:srgbClr val="F5F8FC"/>
+          </a:solidFill>
+          <a:ln>
+            <a:noFill/>
+          </a:ln>
+        </p:spPr>
+        <p:style>
+          <a:lnRef idx="1">
+            <a:schemeClr val="accent1"/>
+          </a:lnRef>
+          <a:fillRef idx="3">
+            <a:schemeClr val="accent1"/>
+          </a:fillRef>
+          <a:effectRef idx="2">
+            <a:schemeClr val="accent1"/>
+          </a:effectRef>
+          <a:fontRef idx="minor">
+            <a:schemeClr val="lt1"/>
+          </a:fontRef>
+        </p:style>
+        <p:txBody>
+          <a:bodyPr rtlCol="0" anchor="ctr"/>
+          <a:lstStyle/>
+          <a:p>
+            <a:pPr algn="ctr"/>
+          </a:p>
+        </p:txBody>
+      </p:sp>
+      <p:sp>
+        <p:nvSpPr>
+          <p:cNvPr id="12" name="Rectangle 11"/>
+          <p:cNvSpPr/>
+          <p:nvPr/>
+        </p:nvSpPr>
+        <p:spPr>
+          <a:xfrm>
+            <a:off x="731520" y="1828800"/>
+            <a:ext cx="91440" cy="2011680"/>
+          </a:xfrm>
+          <a:prstGeom prst="rect">
+            <a:avLst/>
+          </a:prstGeom>
+          <a:solidFill>
+            <a:srgbClr val="2E7D32"/>
+          </a:solidFill>
+          <a:ln>
+            <a:noFill/>
+          </a:ln>
+        </p:spPr>
+        <p:style>
+          <a:lnRef idx="1">
+            <a:schemeClr val="accent1"/>
+          </a:lnRef>
+          <a:fillRef idx="3">
+            <a:schemeClr val="accent1"/>
+          </a:fillRef>
+          <a:effectRef idx="2">
+            <a:schemeClr val="accent1"/>
+          </a:effectRef>
+          <a:fontRef idx="minor">
+            <a:schemeClr val="lt1"/>
+          </a:fontRef>
+        </p:style>
+        <p:txBody>
+          <a:bodyPr rtlCol="0" anchor="ctr"/>
+          <a:lstStyle/>
+          <a:p>
+            <a:pPr algn="ctr"/>
+          </a:p>
+        </p:txBody>
+      </p:sp>
+      <p:sp>
+        <p:nvSpPr>
+          <p:cNvPr id="13" name="TextBox 12"/>
+          <p:cNvSpPr txBox="1"/>
+          <p:nvPr/>
+        </p:nvSpPr>
+        <p:spPr>
+          <a:xfrm>
+            <a:off x="1005840" y="1920240"/>
+            <a:ext cx="731520" cy="365760"/>
+          </a:xfrm>
+          <a:prstGeom prst="rect">
+            <a:avLst/>
+          </a:prstGeom>
+          <a:noFill/>
+        </p:spPr>
+        <p:txBody>
+          <a:bodyPr wrap="square">
+            <a:spAutoFit/>
+          </a:bodyPr>
+          <a:lstStyle/>
+          <a:p>
+            <a:pPr algn="l">
+              <a:lnSpc>
+                <a:spcPts val="2400"/>
+              </a:lnSpc>
+              <a:defRPr sz="2000" b="0" i="0">
+                <a:solidFill>
+                  <a:srgbClr val="1A3C5E"/>
+                </a:solidFill>
+                <a:latin typeface="微软雅黑"/>
+              </a:defRPr>
+            </a:pPr>
+            <a:r>
+              <a:t>📖</a:t>
+            </a:r>
+          </a:p>
+        </p:txBody>
+      </p:sp>
+      <p:sp>
+        <p:nvSpPr>
+          <p:cNvPr id="14" name="TextBox 13"/>
+          <p:cNvSpPr txBox="1"/>
+          <p:nvPr/>
+        </p:nvSpPr>
+        <p:spPr>
+          <a:xfrm>
+            <a:off x="1828800" y="1920240"/>
+            <a:ext cx="9144000" cy="365760"/>
+          </a:xfrm>
+          <a:prstGeom prst="rect">
+            <a:avLst/>
+          </a:prstGeom>
+          <a:noFill/>
+        </p:spPr>
+        <p:txBody>
+          <a:bodyPr wrap="square">
+            <a:spAutoFit/>
+          </a:bodyPr>
+          <a:lstStyle/>
+          <a:p>
+            <a:pPr algn="l">
+              <a:lnSpc>
+                <a:spcPts val="1900"/>
+              </a:lnSpc>
+              <a:defRPr sz="1600" b="1" i="0">
                 <a:solidFill>
                   <a:srgbClr val="2E7D32"/>
                 </a:solidFill>
@@ -4154,21 +5399,21 @@
               </a:defRPr>
             </a:pPr>
             <a:r>
-              <a:t>教学内容：</a:t>
-            </a:r>
-          </a:p>
-        </p:txBody>
-      </p:sp>
-      <p:sp>
-        <p:nvSpPr>
-          <p:cNvPr id="7" name="TextBox 6"/>
+              <a:t>教学内容</a:t>
+            </a:r>
+          </a:p>
+        </p:txBody>
+      </p:sp>
+      <p:sp>
+        <p:nvSpPr>
+          <p:cNvPr id="15" name="TextBox 14"/>
           <p:cNvSpPr txBox="1"/>
           <p:nvPr/>
         </p:nvSpPr>
         <p:spPr>
           <a:xfrm>
-            <a:off x="731520" y="2560320"/>
-            <a:ext cx="10515600" cy="1828800"/>
+            <a:off x="1828800" y="2377440"/>
+            <a:ext cx="9144000" cy="1280160"/>
           </a:xfrm>
           <a:prstGeom prst="rect">
             <a:avLst/>
@@ -4182,9 +5427,12 @@
           <a:lstStyle/>
           <a:p>
             <a:pPr algn="l">
-              <a:defRPr sz="1600" b="0">
+              <a:lnSpc>
+                <a:spcPts val="2500"/>
+              </a:lnSpc>
+              <a:defRPr sz="1600" b="0" i="0">
                 <a:solidFill>
-                  <a:srgbClr val="334455"/>
+                  <a:srgbClr val="323C50"/>
                 </a:solidFill>
                 <a:latin typeface="微软雅黑"/>
               </a:defRPr>
@@ -4197,14 +5445,100 @@
       </p:sp>
       <p:sp>
         <p:nvSpPr>
-          <p:cNvPr id="8" name="TextBox 7"/>
+          <p:cNvPr id="16" name="Rounded Rectangle 15"/>
+          <p:cNvSpPr/>
+          <p:nvPr/>
+        </p:nvSpPr>
+        <p:spPr>
+          <a:xfrm>
+            <a:off x="731520" y="4114800"/>
+            <a:ext cx="5029200" cy="1645920"/>
+          </a:xfrm>
+          <a:prstGeom prst="roundRect">
+            <a:avLst/>
+          </a:prstGeom>
+          <a:solidFill>
+            <a:srgbClr val="F0FAF0"/>
+          </a:solidFill>
+          <a:ln>
+            <a:noFill/>
+          </a:ln>
+        </p:spPr>
+        <p:style>
+          <a:lnRef idx="1">
+            <a:schemeClr val="accent1"/>
+          </a:lnRef>
+          <a:fillRef idx="3">
+            <a:schemeClr val="accent1"/>
+          </a:fillRef>
+          <a:effectRef idx="2">
+            <a:schemeClr val="accent1"/>
+          </a:effectRef>
+          <a:fontRef idx="minor">
+            <a:schemeClr val="lt1"/>
+          </a:fontRef>
+        </p:style>
+        <p:txBody>
+          <a:bodyPr rtlCol="0" anchor="ctr"/>
+          <a:lstStyle/>
+          <a:p>
+            <a:pPr algn="ctr"/>
+          </a:p>
+        </p:txBody>
+      </p:sp>
+      <p:sp>
+        <p:nvSpPr>
+          <p:cNvPr id="17" name="Rectangle 16"/>
+          <p:cNvSpPr/>
+          <p:nvPr/>
+        </p:nvSpPr>
+        <p:spPr>
+          <a:xfrm>
+            <a:off x="731520" y="4114800"/>
+            <a:ext cx="91440" cy="1645920"/>
+          </a:xfrm>
+          <a:prstGeom prst="rect">
+            <a:avLst/>
+          </a:prstGeom>
+          <a:solidFill>
+            <a:srgbClr val="3CA050"/>
+          </a:solidFill>
+          <a:ln>
+            <a:noFill/>
+          </a:ln>
+        </p:spPr>
+        <p:style>
+          <a:lnRef idx="1">
+            <a:schemeClr val="accent1"/>
+          </a:lnRef>
+          <a:fillRef idx="3">
+            <a:schemeClr val="accent1"/>
+          </a:fillRef>
+          <a:effectRef idx="2">
+            <a:schemeClr val="accent1"/>
+          </a:effectRef>
+          <a:fontRef idx="minor">
+            <a:schemeClr val="lt1"/>
+          </a:fontRef>
+        </p:style>
+        <p:txBody>
+          <a:bodyPr rtlCol="0" anchor="ctr"/>
+          <a:lstStyle/>
+          <a:p>
+            <a:pPr algn="ctr"/>
+          </a:p>
+        </p:txBody>
+      </p:sp>
+      <p:sp>
+        <p:nvSpPr>
+          <p:cNvPr id="18" name="TextBox 17"/>
           <p:cNvSpPr txBox="1"/>
           <p:nvPr/>
         </p:nvSpPr>
         <p:spPr>
           <a:xfrm>
-            <a:off x="731520" y="4389120"/>
-            <a:ext cx="10515600" cy="548640"/>
+            <a:off x="1005840" y="4206240"/>
+            <a:ext cx="731520" cy="365760"/>
           </a:xfrm>
           <a:prstGeom prst="rect">
             <a:avLst/>
@@ -4218,29 +5552,32 @@
           <a:lstStyle/>
           <a:p>
             <a:pPr algn="l">
-              <a:defRPr sz="1600" b="0">
+              <a:lnSpc>
+                <a:spcPts val="2100"/>
+              </a:lnSpc>
+              <a:defRPr sz="1800" b="0" i="0">
                 <a:solidFill>
-                  <a:srgbClr val="666666"/>
+                  <a:srgbClr val="1A3C5E"/>
                 </a:solidFill>
                 <a:latin typeface="微软雅黑"/>
               </a:defRPr>
             </a:pPr>
             <a:r>
-              <a:t>教学方法：{{ 环节1方法 }}</a:t>
-            </a:r>
-          </a:p>
-        </p:txBody>
-      </p:sp>
-      <p:sp>
-        <p:nvSpPr>
-          <p:cNvPr id="9" name="TextBox 8"/>
+              <a:t>💡</a:t>
+            </a:r>
+          </a:p>
+        </p:txBody>
+      </p:sp>
+      <p:sp>
+        <p:nvSpPr>
+          <p:cNvPr id="19" name="TextBox 18"/>
           <p:cNvSpPr txBox="1"/>
           <p:nvPr/>
         </p:nvSpPr>
         <p:spPr>
           <a:xfrm>
-            <a:off x="731520" y="5029200"/>
-            <a:ext cx="10515600" cy="731520"/>
+            <a:off x="1828800" y="4206240"/>
+            <a:ext cx="3657600" cy="365760"/>
           </a:xfrm>
           <a:prstGeom prst="rect">
             <a:avLst/>
@@ -4254,15 +5591,260 @@
           <a:lstStyle/>
           <a:p>
             <a:pPr algn="l">
-              <a:defRPr sz="1400" b="0">
+              <a:lnSpc>
+                <a:spcPts val="1900"/>
+              </a:lnSpc>
+              <a:defRPr sz="1600" b="1" i="0">
                 <a:solidFill>
-                  <a:srgbClr val="888888"/>
+                  <a:srgbClr val="28783C"/>
                 </a:solidFill>
                 <a:latin typeface="微软雅黑"/>
               </a:defRPr>
             </a:pPr>
             <a:r>
-              <a:t>知识点：{{ 环节1知识点 }}</a:t>
+              <a:t>教学方法</a:t>
+            </a:r>
+          </a:p>
+        </p:txBody>
+      </p:sp>
+      <p:sp>
+        <p:nvSpPr>
+          <p:cNvPr id="20" name="TextBox 19"/>
+          <p:cNvSpPr txBox="1"/>
+          <p:nvPr/>
+        </p:nvSpPr>
+        <p:spPr>
+          <a:xfrm>
+            <a:off x="1828800" y="4663440"/>
+            <a:ext cx="4114800" cy="914400"/>
+          </a:xfrm>
+          <a:prstGeom prst="rect">
+            <a:avLst/>
+          </a:prstGeom>
+          <a:noFill/>
+        </p:spPr>
+        <p:txBody>
+          <a:bodyPr wrap="square">
+            <a:spAutoFit/>
+          </a:bodyPr>
+          <a:lstStyle/>
+          <a:p>
+            <a:pPr algn="l">
+              <a:lnSpc>
+                <a:spcPts val="1600"/>
+              </a:lnSpc>
+              <a:defRPr sz="1400" b="0" i="0">
+                <a:solidFill>
+                  <a:srgbClr val="32463C"/>
+                </a:solidFill>
+                <a:latin typeface="微软雅黑"/>
+              </a:defRPr>
+            </a:pPr>
+            <a:r>
+              <a:t>{{ 环节1方法 }}</a:t>
+            </a:r>
+          </a:p>
+        </p:txBody>
+      </p:sp>
+      <p:sp>
+        <p:nvSpPr>
+          <p:cNvPr id="21" name="Rounded Rectangle 20"/>
+          <p:cNvSpPr/>
+          <p:nvPr/>
+        </p:nvSpPr>
+        <p:spPr>
+          <a:xfrm>
+            <a:off x="6035040" y="4114800"/>
+            <a:ext cx="5394960" cy="1645920"/>
+          </a:xfrm>
+          <a:prstGeom prst="roundRect">
+            <a:avLst/>
+          </a:prstGeom>
+          <a:solidFill>
+            <a:srgbClr val="FFF8F0"/>
+          </a:solidFill>
+          <a:ln>
+            <a:noFill/>
+          </a:ln>
+        </p:spPr>
+        <p:style>
+          <a:lnRef idx="1">
+            <a:schemeClr val="accent1"/>
+          </a:lnRef>
+          <a:fillRef idx="3">
+            <a:schemeClr val="accent1"/>
+          </a:fillRef>
+          <a:effectRef idx="2">
+            <a:schemeClr val="accent1"/>
+          </a:effectRef>
+          <a:fontRef idx="minor">
+            <a:schemeClr val="lt1"/>
+          </a:fontRef>
+        </p:style>
+        <p:txBody>
+          <a:bodyPr rtlCol="0" anchor="ctr"/>
+          <a:lstStyle/>
+          <a:p>
+            <a:pPr algn="ctr"/>
+          </a:p>
+        </p:txBody>
+      </p:sp>
+      <p:sp>
+        <p:nvSpPr>
+          <p:cNvPr id="22" name="Rectangle 21"/>
+          <p:cNvSpPr/>
+          <p:nvPr/>
+        </p:nvSpPr>
+        <p:spPr>
+          <a:xfrm>
+            <a:off x="6035040" y="4114800"/>
+            <a:ext cx="91440" cy="1645920"/>
+          </a:xfrm>
+          <a:prstGeom prst="rect">
+            <a:avLst/>
+          </a:prstGeom>
+          <a:solidFill>
+            <a:srgbClr val="C88C28"/>
+          </a:solidFill>
+          <a:ln>
+            <a:noFill/>
+          </a:ln>
+        </p:spPr>
+        <p:style>
+          <a:lnRef idx="1">
+            <a:schemeClr val="accent1"/>
+          </a:lnRef>
+          <a:fillRef idx="3">
+            <a:schemeClr val="accent1"/>
+          </a:fillRef>
+          <a:effectRef idx="2">
+            <a:schemeClr val="accent1"/>
+          </a:effectRef>
+          <a:fontRef idx="minor">
+            <a:schemeClr val="lt1"/>
+          </a:fontRef>
+        </p:style>
+        <p:txBody>
+          <a:bodyPr rtlCol="0" anchor="ctr"/>
+          <a:lstStyle/>
+          <a:p>
+            <a:pPr algn="ctr"/>
+          </a:p>
+        </p:txBody>
+      </p:sp>
+      <p:sp>
+        <p:nvSpPr>
+          <p:cNvPr id="23" name="TextBox 22"/>
+          <p:cNvSpPr txBox="1"/>
+          <p:nvPr/>
+        </p:nvSpPr>
+        <p:spPr>
+          <a:xfrm>
+            <a:off x="6309360" y="4206240"/>
+            <a:ext cx="731520" cy="365760"/>
+          </a:xfrm>
+          <a:prstGeom prst="rect">
+            <a:avLst/>
+          </a:prstGeom>
+          <a:noFill/>
+        </p:spPr>
+        <p:txBody>
+          <a:bodyPr wrap="square">
+            <a:spAutoFit/>
+          </a:bodyPr>
+          <a:lstStyle/>
+          <a:p>
+            <a:pPr algn="l">
+              <a:lnSpc>
+                <a:spcPts val="2100"/>
+              </a:lnSpc>
+              <a:defRPr sz="1800" b="0" i="0">
+                <a:solidFill>
+                  <a:srgbClr val="1A3C5E"/>
+                </a:solidFill>
+                <a:latin typeface="微软雅黑"/>
+              </a:defRPr>
+            </a:pPr>
+            <a:r>
+              <a:t>🔑</a:t>
+            </a:r>
+          </a:p>
+        </p:txBody>
+      </p:sp>
+      <p:sp>
+        <p:nvSpPr>
+          <p:cNvPr id="24" name="TextBox 23"/>
+          <p:cNvSpPr txBox="1"/>
+          <p:nvPr/>
+        </p:nvSpPr>
+        <p:spPr>
+          <a:xfrm>
+            <a:off x="7132320" y="4206240"/>
+            <a:ext cx="4114800" cy="365760"/>
+          </a:xfrm>
+          <a:prstGeom prst="rect">
+            <a:avLst/>
+          </a:prstGeom>
+          <a:noFill/>
+        </p:spPr>
+        <p:txBody>
+          <a:bodyPr wrap="square">
+            <a:spAutoFit/>
+          </a:bodyPr>
+          <a:lstStyle/>
+          <a:p>
+            <a:pPr algn="l">
+              <a:lnSpc>
+                <a:spcPts val="1900"/>
+              </a:lnSpc>
+              <a:defRPr sz="1600" b="1" i="0">
+                <a:solidFill>
+                  <a:srgbClr val="A06414"/>
+                </a:solidFill>
+                <a:latin typeface="微软雅黑"/>
+              </a:defRPr>
+            </a:pPr>
+            <a:r>
+              <a:t>知识点</a:t>
+            </a:r>
+          </a:p>
+        </p:txBody>
+      </p:sp>
+      <p:sp>
+        <p:nvSpPr>
+          <p:cNvPr id="25" name="TextBox 24"/>
+          <p:cNvSpPr txBox="1"/>
+          <p:nvPr/>
+        </p:nvSpPr>
+        <p:spPr>
+          <a:xfrm>
+            <a:off x="7132320" y="4663440"/>
+            <a:ext cx="4114800" cy="914400"/>
+          </a:xfrm>
+          <a:prstGeom prst="rect">
+            <a:avLst/>
+          </a:prstGeom>
+          <a:noFill/>
+        </p:spPr>
+        <p:txBody>
+          <a:bodyPr wrap="square">
+            <a:spAutoFit/>
+          </a:bodyPr>
+          <a:lstStyle/>
+          <a:p>
+            <a:pPr algn="l">
+              <a:lnSpc>
+                <a:spcPts val="1600"/>
+              </a:lnSpc>
+              <a:defRPr sz="1400" b="0" i="0">
+                <a:solidFill>
+                  <a:srgbClr val="503C1E"/>
+                </a:solidFill>
+                <a:latin typeface="微软雅黑"/>
+              </a:defRPr>
+            </a:pPr>
+            <a:r>
+              <a:t>{{ 环节1知识点 }}</a:t>
             </a:r>
           </a:p>
         </p:txBody>
@@ -4278,14 +5860,6 @@
 <file path=ppt/slides/slide5.xml><?xml version="1.0" encoding="utf-8"?>
 <p:sld xmlns:a="http://schemas.openxmlformats.org/drawingml/2006/main" xmlns:p="http://schemas.openxmlformats.org/presentationml/2006/main" xmlns:r="http://schemas.openxmlformats.org/officeDocument/2006/relationships">
   <p:cSld>
-    <p:bg>
-      <p:bgPr>
-        <a:solidFill>
-          <a:srgbClr val="FFFFFF"/>
-        </a:solidFill>
-        <a:effectLst/>
-      </p:bgPr>
-    </p:bg>
     <p:spTree>
       <p:nvGrpSpPr>
         <p:cNvPr id="1" name=""/>
@@ -4302,13 +5876,13 @@
         <p:spPr>
           <a:xfrm>
             <a:off x="0" y="0"/>
-            <a:ext cx="12191695" cy="73152"/>
-          </a:xfrm>
-          <a:prstGeom prst="rect">
-            <a:avLst/>
-          </a:prstGeom>
-          <a:solidFill>
-            <a:srgbClr val="2E7D32"/>
+            <a:ext cx="12191695" cy="6858000"/>
+          </a:xfrm>
+          <a:prstGeom prst="rect">
+            <a:avLst/>
+          </a:prstGeom>
+          <a:solidFill>
+            <a:srgbClr val="FFFFFF"/>
           </a:solidFill>
           <a:ln>
             <a:noFill/>
@@ -4338,50 +5912,14 @@
       </p:sp>
       <p:sp>
         <p:nvSpPr>
-          <p:cNvPr id="3" name="TextBox 2"/>
-          <p:cNvSpPr txBox="1"/>
-          <p:nvPr/>
-        </p:nvSpPr>
-        <p:spPr>
-          <a:xfrm>
-            <a:off x="731520" y="365760"/>
-            <a:ext cx="3657600" cy="731520"/>
-          </a:xfrm>
-          <a:prstGeom prst="rect">
-            <a:avLst/>
-          </a:prstGeom>
-          <a:noFill/>
-        </p:spPr>
-        <p:txBody>
-          <a:bodyPr wrap="square">
-            <a:spAutoFit/>
-          </a:bodyPr>
-          <a:lstStyle/>
-          <a:p>
-            <a:pPr algn="l">
-              <a:defRPr sz="3200" b="1">
-                <a:solidFill>
-                  <a:srgbClr val="1B5E20"/>
-                </a:solidFill>
-                <a:latin typeface="微软雅黑"/>
-              </a:defRPr>
-            </a:pPr>
-            <a:r>
-              <a:t>{{ 环节2标题 }}</a:t>
-            </a:r>
-          </a:p>
-        </p:txBody>
-      </p:sp>
-      <p:sp>
-        <p:nvSpPr>
-          <p:cNvPr id="4" name="Rectangle 3"/>
+          <p:cNvPr id="3" name="Rectangle 2"/>
           <p:cNvSpPr/>
           <p:nvPr/>
         </p:nvSpPr>
         <p:spPr>
           <a:xfrm>
-            <a:off x="731520" y="1097280"/>
-            <a:ext cx="2286000" cy="54864"/>
+            <a:off x="0" y="0"/>
+            <a:ext cx="12191695" cy="109728"/>
           </a:xfrm>
           <a:prstGeom prst="rect">
             <a:avLst/>
@@ -4417,14 +5955,100 @@
       </p:sp>
       <p:sp>
         <p:nvSpPr>
-          <p:cNvPr id="5" name="TextBox 4"/>
+          <p:cNvPr id="4" name="Rectangle 3"/>
+          <p:cNvSpPr/>
+          <p:nvPr/>
+        </p:nvSpPr>
+        <p:spPr>
+          <a:xfrm>
+            <a:off x="0" y="0"/>
+            <a:ext cx="548640" cy="6858000"/>
+          </a:xfrm>
+          <a:prstGeom prst="rect">
+            <a:avLst/>
+          </a:prstGeom>
+          <a:solidFill>
+            <a:srgbClr val="143719"/>
+          </a:solidFill>
+          <a:ln>
+            <a:noFill/>
+          </a:ln>
+        </p:spPr>
+        <p:style>
+          <a:lnRef idx="1">
+            <a:schemeClr val="accent1"/>
+          </a:lnRef>
+          <a:fillRef idx="3">
+            <a:schemeClr val="accent1"/>
+          </a:fillRef>
+          <a:effectRef idx="2">
+            <a:schemeClr val="accent1"/>
+          </a:effectRef>
+          <a:fontRef idx="minor">
+            <a:schemeClr val="lt1"/>
+          </a:fontRef>
+        </p:style>
+        <p:txBody>
+          <a:bodyPr rtlCol="0" anchor="ctr"/>
+          <a:lstStyle/>
+          <a:p>
+            <a:pPr algn="ctr"/>
+          </a:p>
+        </p:txBody>
+      </p:sp>
+      <p:sp>
+        <p:nvSpPr>
+          <p:cNvPr id="5" name="Oval 4"/>
+          <p:cNvSpPr/>
+          <p:nvPr/>
+        </p:nvSpPr>
+        <p:spPr>
+          <a:xfrm>
+            <a:off x="731520" y="548640"/>
+            <a:ext cx="914400" cy="914400"/>
+          </a:xfrm>
+          <a:prstGeom prst="ellipse">
+            <a:avLst/>
+          </a:prstGeom>
+          <a:solidFill>
+            <a:srgbClr val="2E7D32"/>
+          </a:solidFill>
+          <a:ln>
+            <a:noFill/>
+          </a:ln>
+        </p:spPr>
+        <p:style>
+          <a:lnRef idx="1">
+            <a:schemeClr val="accent1"/>
+          </a:lnRef>
+          <a:fillRef idx="3">
+            <a:schemeClr val="accent1"/>
+          </a:fillRef>
+          <a:effectRef idx="2">
+            <a:schemeClr val="accent1"/>
+          </a:effectRef>
+          <a:fontRef idx="minor">
+            <a:schemeClr val="lt1"/>
+          </a:fontRef>
+        </p:style>
+        <p:txBody>
+          <a:bodyPr rtlCol="0" anchor="ctr"/>
+          <a:lstStyle/>
+          <a:p>
+            <a:pPr algn="ctr"/>
+          </a:p>
+        </p:txBody>
+      </p:sp>
+      <p:sp>
+        <p:nvSpPr>
+          <p:cNvPr id="6" name="TextBox 5"/>
           <p:cNvSpPr txBox="1"/>
           <p:nvPr/>
         </p:nvSpPr>
         <p:spPr>
           <a:xfrm>
-            <a:off x="731520" y="1463040"/>
-            <a:ext cx="10515600" cy="457200"/>
+            <a:off x="731520" y="594360"/>
+            <a:ext cx="914400" cy="822960"/>
           </a:xfrm>
           <a:prstGeom prst="rect">
             <a:avLst/>
@@ -4437,30 +6061,33 @@
           </a:bodyPr>
           <a:lstStyle/>
           <a:p>
-            <a:pPr algn="l">
-              <a:defRPr sz="1600" b="0">
+            <a:pPr algn="ctr">
+              <a:lnSpc>
+                <a:spcPts val="4300"/>
+              </a:lnSpc>
+              <a:defRPr sz="3600" b="1" i="0">
                 <a:solidFill>
-                  <a:srgbClr val="888888"/>
+                  <a:srgbClr val="FFFFFF"/>
                 </a:solidFill>
                 <a:latin typeface="微软雅黑"/>
               </a:defRPr>
             </a:pPr>
             <a:r>
-              <a:t>时长：{{ 环节2时长 }}</a:t>
-            </a:r>
-          </a:p>
-        </p:txBody>
-      </p:sp>
-      <p:sp>
-        <p:nvSpPr>
-          <p:cNvPr id="6" name="TextBox 5"/>
+              <a:t>2</a:t>
+            </a:r>
+          </a:p>
+        </p:txBody>
+      </p:sp>
+      <p:sp>
+        <p:nvSpPr>
+          <p:cNvPr id="7" name="TextBox 6"/>
           <p:cNvSpPr txBox="1"/>
           <p:nvPr/>
         </p:nvSpPr>
         <p:spPr>
           <a:xfrm>
-            <a:off x="731520" y="2011680"/>
-            <a:ext cx="10515600" cy="1097280"/>
+            <a:off x="1828800" y="640080"/>
+            <a:ext cx="7315200" cy="731520"/>
           </a:xfrm>
           <a:prstGeom prst="rect">
             <a:avLst/>
@@ -4474,7 +6101,299 @@
           <a:lstStyle/>
           <a:p>
             <a:pPr algn="l">
-              <a:defRPr sz="2000" b="1">
+              <a:lnSpc>
+                <a:spcPts val="3600"/>
+              </a:lnSpc>
+              <a:defRPr sz="3000" b="1" i="0">
+                <a:solidFill>
+                  <a:srgbClr val="143719"/>
+                </a:solidFill>
+                <a:latin typeface="微软雅黑"/>
+              </a:defRPr>
+            </a:pPr>
+            <a:r>
+              <a:t>{{ 环节2标题 }}</a:t>
+            </a:r>
+          </a:p>
+        </p:txBody>
+      </p:sp>
+      <p:sp>
+        <p:nvSpPr>
+          <p:cNvPr id="8" name="Rounded Rectangle 7"/>
+          <p:cNvSpPr/>
+          <p:nvPr/>
+        </p:nvSpPr>
+        <p:spPr>
+          <a:xfrm>
+            <a:off x="9601200" y="731520"/>
+            <a:ext cx="2286000" cy="548640"/>
+          </a:xfrm>
+          <a:prstGeom prst="roundRect">
+            <a:avLst/>
+          </a:prstGeom>
+          <a:solidFill>
+            <a:srgbClr val="328C3C"/>
+          </a:solidFill>
+          <a:ln>
+            <a:noFill/>
+          </a:ln>
+        </p:spPr>
+        <p:style>
+          <a:lnRef idx="1">
+            <a:schemeClr val="accent1"/>
+          </a:lnRef>
+          <a:fillRef idx="3">
+            <a:schemeClr val="accent1"/>
+          </a:fillRef>
+          <a:effectRef idx="2">
+            <a:schemeClr val="accent1"/>
+          </a:effectRef>
+          <a:fontRef idx="minor">
+            <a:schemeClr val="lt1"/>
+          </a:fontRef>
+        </p:style>
+        <p:txBody>
+          <a:bodyPr rtlCol="0" anchor="ctr"/>
+          <a:lstStyle/>
+          <a:p>
+            <a:pPr algn="ctr"/>
+          </a:p>
+        </p:txBody>
+      </p:sp>
+      <p:sp>
+        <p:nvSpPr>
+          <p:cNvPr id="9" name="TextBox 8"/>
+          <p:cNvSpPr txBox="1"/>
+          <p:nvPr/>
+        </p:nvSpPr>
+        <p:spPr>
+          <a:xfrm>
+            <a:off x="9601200" y="749808"/>
+            <a:ext cx="2286000" cy="502920"/>
+          </a:xfrm>
+          <a:prstGeom prst="rect">
+            <a:avLst/>
+          </a:prstGeom>
+          <a:noFill/>
+        </p:spPr>
+        <p:txBody>
+          <a:bodyPr wrap="square">
+            <a:spAutoFit/>
+          </a:bodyPr>
+          <a:lstStyle/>
+          <a:p>
+            <a:pPr algn="ctr">
+              <a:lnSpc>
+                <a:spcPts val="1600"/>
+              </a:lnSpc>
+              <a:defRPr sz="1400" b="1" i="0">
+                <a:solidFill>
+                  <a:srgbClr val="143719"/>
+                </a:solidFill>
+                <a:latin typeface="微软雅黑"/>
+              </a:defRPr>
+            </a:pPr>
+            <a:r>
+              <a:t>⏱ { 环节2时长 }</a:t>
+            </a:r>
+          </a:p>
+        </p:txBody>
+      </p:sp>
+      <p:sp>
+        <p:nvSpPr>
+          <p:cNvPr id="10" name="Rectangle 9"/>
+          <p:cNvSpPr/>
+          <p:nvPr/>
+        </p:nvSpPr>
+        <p:spPr>
+          <a:xfrm>
+            <a:off x="1828800" y="1463040"/>
+            <a:ext cx="3657600" cy="36576"/>
+          </a:xfrm>
+          <a:prstGeom prst="rect">
+            <a:avLst/>
+          </a:prstGeom>
+          <a:solidFill>
+            <a:srgbClr val="2E7D32"/>
+          </a:solidFill>
+          <a:ln>
+            <a:noFill/>
+          </a:ln>
+        </p:spPr>
+        <p:style>
+          <a:lnRef idx="1">
+            <a:schemeClr val="accent1"/>
+          </a:lnRef>
+          <a:fillRef idx="3">
+            <a:schemeClr val="accent1"/>
+          </a:fillRef>
+          <a:effectRef idx="2">
+            <a:schemeClr val="accent1"/>
+          </a:effectRef>
+          <a:fontRef idx="minor">
+            <a:schemeClr val="lt1"/>
+          </a:fontRef>
+        </p:style>
+        <p:txBody>
+          <a:bodyPr rtlCol="0" anchor="ctr"/>
+          <a:lstStyle/>
+          <a:p>
+            <a:pPr algn="ctr"/>
+          </a:p>
+        </p:txBody>
+      </p:sp>
+      <p:sp>
+        <p:nvSpPr>
+          <p:cNvPr id="11" name="Rounded Rectangle 10"/>
+          <p:cNvSpPr/>
+          <p:nvPr/>
+        </p:nvSpPr>
+        <p:spPr>
+          <a:xfrm>
+            <a:off x="731520" y="1828800"/>
+            <a:ext cx="10698480" cy="2011680"/>
+          </a:xfrm>
+          <a:prstGeom prst="roundRect">
+            <a:avLst/>
+          </a:prstGeom>
+          <a:solidFill>
+            <a:srgbClr val="F5F8FC"/>
+          </a:solidFill>
+          <a:ln>
+            <a:noFill/>
+          </a:ln>
+        </p:spPr>
+        <p:style>
+          <a:lnRef idx="1">
+            <a:schemeClr val="accent1"/>
+          </a:lnRef>
+          <a:fillRef idx="3">
+            <a:schemeClr val="accent1"/>
+          </a:fillRef>
+          <a:effectRef idx="2">
+            <a:schemeClr val="accent1"/>
+          </a:effectRef>
+          <a:fontRef idx="minor">
+            <a:schemeClr val="lt1"/>
+          </a:fontRef>
+        </p:style>
+        <p:txBody>
+          <a:bodyPr rtlCol="0" anchor="ctr"/>
+          <a:lstStyle/>
+          <a:p>
+            <a:pPr algn="ctr"/>
+          </a:p>
+        </p:txBody>
+      </p:sp>
+      <p:sp>
+        <p:nvSpPr>
+          <p:cNvPr id="12" name="Rectangle 11"/>
+          <p:cNvSpPr/>
+          <p:nvPr/>
+        </p:nvSpPr>
+        <p:spPr>
+          <a:xfrm>
+            <a:off x="731520" y="1828800"/>
+            <a:ext cx="91440" cy="2011680"/>
+          </a:xfrm>
+          <a:prstGeom prst="rect">
+            <a:avLst/>
+          </a:prstGeom>
+          <a:solidFill>
+            <a:srgbClr val="2E7D32"/>
+          </a:solidFill>
+          <a:ln>
+            <a:noFill/>
+          </a:ln>
+        </p:spPr>
+        <p:style>
+          <a:lnRef idx="1">
+            <a:schemeClr val="accent1"/>
+          </a:lnRef>
+          <a:fillRef idx="3">
+            <a:schemeClr val="accent1"/>
+          </a:fillRef>
+          <a:effectRef idx="2">
+            <a:schemeClr val="accent1"/>
+          </a:effectRef>
+          <a:fontRef idx="minor">
+            <a:schemeClr val="lt1"/>
+          </a:fontRef>
+        </p:style>
+        <p:txBody>
+          <a:bodyPr rtlCol="0" anchor="ctr"/>
+          <a:lstStyle/>
+          <a:p>
+            <a:pPr algn="ctr"/>
+          </a:p>
+        </p:txBody>
+      </p:sp>
+      <p:sp>
+        <p:nvSpPr>
+          <p:cNvPr id="13" name="TextBox 12"/>
+          <p:cNvSpPr txBox="1"/>
+          <p:nvPr/>
+        </p:nvSpPr>
+        <p:spPr>
+          <a:xfrm>
+            <a:off x="1005840" y="1920240"/>
+            <a:ext cx="731520" cy="365760"/>
+          </a:xfrm>
+          <a:prstGeom prst="rect">
+            <a:avLst/>
+          </a:prstGeom>
+          <a:noFill/>
+        </p:spPr>
+        <p:txBody>
+          <a:bodyPr wrap="square">
+            <a:spAutoFit/>
+          </a:bodyPr>
+          <a:lstStyle/>
+          <a:p>
+            <a:pPr algn="l">
+              <a:lnSpc>
+                <a:spcPts val="2400"/>
+              </a:lnSpc>
+              <a:defRPr sz="2000" b="0" i="0">
+                <a:solidFill>
+                  <a:srgbClr val="1A3C5E"/>
+                </a:solidFill>
+                <a:latin typeface="微软雅黑"/>
+              </a:defRPr>
+            </a:pPr>
+            <a:r>
+              <a:t>📖</a:t>
+            </a:r>
+          </a:p>
+        </p:txBody>
+      </p:sp>
+      <p:sp>
+        <p:nvSpPr>
+          <p:cNvPr id="14" name="TextBox 13"/>
+          <p:cNvSpPr txBox="1"/>
+          <p:nvPr/>
+        </p:nvSpPr>
+        <p:spPr>
+          <a:xfrm>
+            <a:off x="1828800" y="1920240"/>
+            <a:ext cx="9144000" cy="365760"/>
+          </a:xfrm>
+          <a:prstGeom prst="rect">
+            <a:avLst/>
+          </a:prstGeom>
+          <a:noFill/>
+        </p:spPr>
+        <p:txBody>
+          <a:bodyPr wrap="square">
+            <a:spAutoFit/>
+          </a:bodyPr>
+          <a:lstStyle/>
+          <a:p>
+            <a:pPr algn="l">
+              <a:lnSpc>
+                <a:spcPts val="1900"/>
+              </a:lnSpc>
+              <a:defRPr sz="1600" b="1" i="0">
                 <a:solidFill>
                   <a:srgbClr val="2E7D32"/>
                 </a:solidFill>
@@ -4482,21 +6401,21 @@
               </a:defRPr>
             </a:pPr>
             <a:r>
-              <a:t>教学内容：</a:t>
-            </a:r>
-          </a:p>
-        </p:txBody>
-      </p:sp>
-      <p:sp>
-        <p:nvSpPr>
-          <p:cNvPr id="7" name="TextBox 6"/>
+              <a:t>教学内容</a:t>
+            </a:r>
+          </a:p>
+        </p:txBody>
+      </p:sp>
+      <p:sp>
+        <p:nvSpPr>
+          <p:cNvPr id="15" name="TextBox 14"/>
           <p:cNvSpPr txBox="1"/>
           <p:nvPr/>
         </p:nvSpPr>
         <p:spPr>
           <a:xfrm>
-            <a:off x="731520" y="2560320"/>
-            <a:ext cx="10515600" cy="1828800"/>
+            <a:off x="1828800" y="2377440"/>
+            <a:ext cx="9144000" cy="1280160"/>
           </a:xfrm>
           <a:prstGeom prst="rect">
             <a:avLst/>
@@ -4510,9 +6429,12 @@
           <a:lstStyle/>
           <a:p>
             <a:pPr algn="l">
-              <a:defRPr sz="1600" b="0">
+              <a:lnSpc>
+                <a:spcPts val="2500"/>
+              </a:lnSpc>
+              <a:defRPr sz="1600" b="0" i="0">
                 <a:solidFill>
-                  <a:srgbClr val="334455"/>
+                  <a:srgbClr val="323C50"/>
                 </a:solidFill>
                 <a:latin typeface="微软雅黑"/>
               </a:defRPr>
@@ -4525,14 +6447,100 @@
       </p:sp>
       <p:sp>
         <p:nvSpPr>
-          <p:cNvPr id="8" name="TextBox 7"/>
+          <p:cNvPr id="16" name="Rounded Rectangle 15"/>
+          <p:cNvSpPr/>
+          <p:nvPr/>
+        </p:nvSpPr>
+        <p:spPr>
+          <a:xfrm>
+            <a:off x="731520" y="4114800"/>
+            <a:ext cx="5029200" cy="1645920"/>
+          </a:xfrm>
+          <a:prstGeom prst="roundRect">
+            <a:avLst/>
+          </a:prstGeom>
+          <a:solidFill>
+            <a:srgbClr val="F0FAF0"/>
+          </a:solidFill>
+          <a:ln>
+            <a:noFill/>
+          </a:ln>
+        </p:spPr>
+        <p:style>
+          <a:lnRef idx="1">
+            <a:schemeClr val="accent1"/>
+          </a:lnRef>
+          <a:fillRef idx="3">
+            <a:schemeClr val="accent1"/>
+          </a:fillRef>
+          <a:effectRef idx="2">
+            <a:schemeClr val="accent1"/>
+          </a:effectRef>
+          <a:fontRef idx="minor">
+            <a:schemeClr val="lt1"/>
+          </a:fontRef>
+        </p:style>
+        <p:txBody>
+          <a:bodyPr rtlCol="0" anchor="ctr"/>
+          <a:lstStyle/>
+          <a:p>
+            <a:pPr algn="ctr"/>
+          </a:p>
+        </p:txBody>
+      </p:sp>
+      <p:sp>
+        <p:nvSpPr>
+          <p:cNvPr id="17" name="Rectangle 16"/>
+          <p:cNvSpPr/>
+          <p:nvPr/>
+        </p:nvSpPr>
+        <p:spPr>
+          <a:xfrm>
+            <a:off x="731520" y="4114800"/>
+            <a:ext cx="91440" cy="1645920"/>
+          </a:xfrm>
+          <a:prstGeom prst="rect">
+            <a:avLst/>
+          </a:prstGeom>
+          <a:solidFill>
+            <a:srgbClr val="3CA050"/>
+          </a:solidFill>
+          <a:ln>
+            <a:noFill/>
+          </a:ln>
+        </p:spPr>
+        <p:style>
+          <a:lnRef idx="1">
+            <a:schemeClr val="accent1"/>
+          </a:lnRef>
+          <a:fillRef idx="3">
+            <a:schemeClr val="accent1"/>
+          </a:fillRef>
+          <a:effectRef idx="2">
+            <a:schemeClr val="accent1"/>
+          </a:effectRef>
+          <a:fontRef idx="minor">
+            <a:schemeClr val="lt1"/>
+          </a:fontRef>
+        </p:style>
+        <p:txBody>
+          <a:bodyPr rtlCol="0" anchor="ctr"/>
+          <a:lstStyle/>
+          <a:p>
+            <a:pPr algn="ctr"/>
+          </a:p>
+        </p:txBody>
+      </p:sp>
+      <p:sp>
+        <p:nvSpPr>
+          <p:cNvPr id="18" name="TextBox 17"/>
           <p:cNvSpPr txBox="1"/>
           <p:nvPr/>
         </p:nvSpPr>
         <p:spPr>
           <a:xfrm>
-            <a:off x="731520" y="4389120"/>
-            <a:ext cx="10515600" cy="548640"/>
+            <a:off x="1005840" y="4206240"/>
+            <a:ext cx="731520" cy="365760"/>
           </a:xfrm>
           <a:prstGeom prst="rect">
             <a:avLst/>
@@ -4546,29 +6554,32 @@
           <a:lstStyle/>
           <a:p>
             <a:pPr algn="l">
-              <a:defRPr sz="1600" b="0">
+              <a:lnSpc>
+                <a:spcPts val="2100"/>
+              </a:lnSpc>
+              <a:defRPr sz="1800" b="0" i="0">
                 <a:solidFill>
-                  <a:srgbClr val="666666"/>
+                  <a:srgbClr val="1A3C5E"/>
                 </a:solidFill>
                 <a:latin typeface="微软雅黑"/>
               </a:defRPr>
             </a:pPr>
             <a:r>
-              <a:t>教学方法：{{ 环节2方法 }}</a:t>
-            </a:r>
-          </a:p>
-        </p:txBody>
-      </p:sp>
-      <p:sp>
-        <p:nvSpPr>
-          <p:cNvPr id="9" name="TextBox 8"/>
+              <a:t>💡</a:t>
+            </a:r>
+          </a:p>
+        </p:txBody>
+      </p:sp>
+      <p:sp>
+        <p:nvSpPr>
+          <p:cNvPr id="19" name="TextBox 18"/>
           <p:cNvSpPr txBox="1"/>
           <p:nvPr/>
         </p:nvSpPr>
         <p:spPr>
           <a:xfrm>
-            <a:off x="731520" y="5029200"/>
-            <a:ext cx="10515600" cy="731520"/>
+            <a:off x="1828800" y="4206240"/>
+            <a:ext cx="3657600" cy="365760"/>
           </a:xfrm>
           <a:prstGeom prst="rect">
             <a:avLst/>
@@ -4582,15 +6593,260 @@
           <a:lstStyle/>
           <a:p>
             <a:pPr algn="l">
-              <a:defRPr sz="1400" b="0">
+              <a:lnSpc>
+                <a:spcPts val="1900"/>
+              </a:lnSpc>
+              <a:defRPr sz="1600" b="1" i="0">
                 <a:solidFill>
-                  <a:srgbClr val="888888"/>
+                  <a:srgbClr val="28783C"/>
                 </a:solidFill>
                 <a:latin typeface="微软雅黑"/>
               </a:defRPr>
             </a:pPr>
             <a:r>
-              <a:t>知识点：{{ 环节2知识点 }}</a:t>
+              <a:t>教学方法</a:t>
+            </a:r>
+          </a:p>
+        </p:txBody>
+      </p:sp>
+      <p:sp>
+        <p:nvSpPr>
+          <p:cNvPr id="20" name="TextBox 19"/>
+          <p:cNvSpPr txBox="1"/>
+          <p:nvPr/>
+        </p:nvSpPr>
+        <p:spPr>
+          <a:xfrm>
+            <a:off x="1828800" y="4663440"/>
+            <a:ext cx="4114800" cy="914400"/>
+          </a:xfrm>
+          <a:prstGeom prst="rect">
+            <a:avLst/>
+          </a:prstGeom>
+          <a:noFill/>
+        </p:spPr>
+        <p:txBody>
+          <a:bodyPr wrap="square">
+            <a:spAutoFit/>
+          </a:bodyPr>
+          <a:lstStyle/>
+          <a:p>
+            <a:pPr algn="l">
+              <a:lnSpc>
+                <a:spcPts val="1600"/>
+              </a:lnSpc>
+              <a:defRPr sz="1400" b="0" i="0">
+                <a:solidFill>
+                  <a:srgbClr val="32463C"/>
+                </a:solidFill>
+                <a:latin typeface="微软雅黑"/>
+              </a:defRPr>
+            </a:pPr>
+            <a:r>
+              <a:t>{{ 环节2方法 }}</a:t>
+            </a:r>
+          </a:p>
+        </p:txBody>
+      </p:sp>
+      <p:sp>
+        <p:nvSpPr>
+          <p:cNvPr id="21" name="Rounded Rectangle 20"/>
+          <p:cNvSpPr/>
+          <p:nvPr/>
+        </p:nvSpPr>
+        <p:spPr>
+          <a:xfrm>
+            <a:off x="6035040" y="4114800"/>
+            <a:ext cx="5394960" cy="1645920"/>
+          </a:xfrm>
+          <a:prstGeom prst="roundRect">
+            <a:avLst/>
+          </a:prstGeom>
+          <a:solidFill>
+            <a:srgbClr val="FFF8F0"/>
+          </a:solidFill>
+          <a:ln>
+            <a:noFill/>
+          </a:ln>
+        </p:spPr>
+        <p:style>
+          <a:lnRef idx="1">
+            <a:schemeClr val="accent1"/>
+          </a:lnRef>
+          <a:fillRef idx="3">
+            <a:schemeClr val="accent1"/>
+          </a:fillRef>
+          <a:effectRef idx="2">
+            <a:schemeClr val="accent1"/>
+          </a:effectRef>
+          <a:fontRef idx="minor">
+            <a:schemeClr val="lt1"/>
+          </a:fontRef>
+        </p:style>
+        <p:txBody>
+          <a:bodyPr rtlCol="0" anchor="ctr"/>
+          <a:lstStyle/>
+          <a:p>
+            <a:pPr algn="ctr"/>
+          </a:p>
+        </p:txBody>
+      </p:sp>
+      <p:sp>
+        <p:nvSpPr>
+          <p:cNvPr id="22" name="Rectangle 21"/>
+          <p:cNvSpPr/>
+          <p:nvPr/>
+        </p:nvSpPr>
+        <p:spPr>
+          <a:xfrm>
+            <a:off x="6035040" y="4114800"/>
+            <a:ext cx="91440" cy="1645920"/>
+          </a:xfrm>
+          <a:prstGeom prst="rect">
+            <a:avLst/>
+          </a:prstGeom>
+          <a:solidFill>
+            <a:srgbClr val="C88C28"/>
+          </a:solidFill>
+          <a:ln>
+            <a:noFill/>
+          </a:ln>
+        </p:spPr>
+        <p:style>
+          <a:lnRef idx="1">
+            <a:schemeClr val="accent1"/>
+          </a:lnRef>
+          <a:fillRef idx="3">
+            <a:schemeClr val="accent1"/>
+          </a:fillRef>
+          <a:effectRef idx="2">
+            <a:schemeClr val="accent1"/>
+          </a:effectRef>
+          <a:fontRef idx="minor">
+            <a:schemeClr val="lt1"/>
+          </a:fontRef>
+        </p:style>
+        <p:txBody>
+          <a:bodyPr rtlCol="0" anchor="ctr"/>
+          <a:lstStyle/>
+          <a:p>
+            <a:pPr algn="ctr"/>
+          </a:p>
+        </p:txBody>
+      </p:sp>
+      <p:sp>
+        <p:nvSpPr>
+          <p:cNvPr id="23" name="TextBox 22"/>
+          <p:cNvSpPr txBox="1"/>
+          <p:nvPr/>
+        </p:nvSpPr>
+        <p:spPr>
+          <a:xfrm>
+            <a:off x="6309360" y="4206240"/>
+            <a:ext cx="731520" cy="365760"/>
+          </a:xfrm>
+          <a:prstGeom prst="rect">
+            <a:avLst/>
+          </a:prstGeom>
+          <a:noFill/>
+        </p:spPr>
+        <p:txBody>
+          <a:bodyPr wrap="square">
+            <a:spAutoFit/>
+          </a:bodyPr>
+          <a:lstStyle/>
+          <a:p>
+            <a:pPr algn="l">
+              <a:lnSpc>
+                <a:spcPts val="2100"/>
+              </a:lnSpc>
+              <a:defRPr sz="1800" b="0" i="0">
+                <a:solidFill>
+                  <a:srgbClr val="1A3C5E"/>
+                </a:solidFill>
+                <a:latin typeface="微软雅黑"/>
+              </a:defRPr>
+            </a:pPr>
+            <a:r>
+              <a:t>🔑</a:t>
+            </a:r>
+          </a:p>
+        </p:txBody>
+      </p:sp>
+      <p:sp>
+        <p:nvSpPr>
+          <p:cNvPr id="24" name="TextBox 23"/>
+          <p:cNvSpPr txBox="1"/>
+          <p:nvPr/>
+        </p:nvSpPr>
+        <p:spPr>
+          <a:xfrm>
+            <a:off x="7132320" y="4206240"/>
+            <a:ext cx="4114800" cy="365760"/>
+          </a:xfrm>
+          <a:prstGeom prst="rect">
+            <a:avLst/>
+          </a:prstGeom>
+          <a:noFill/>
+        </p:spPr>
+        <p:txBody>
+          <a:bodyPr wrap="square">
+            <a:spAutoFit/>
+          </a:bodyPr>
+          <a:lstStyle/>
+          <a:p>
+            <a:pPr algn="l">
+              <a:lnSpc>
+                <a:spcPts val="1900"/>
+              </a:lnSpc>
+              <a:defRPr sz="1600" b="1" i="0">
+                <a:solidFill>
+                  <a:srgbClr val="A06414"/>
+                </a:solidFill>
+                <a:latin typeface="微软雅黑"/>
+              </a:defRPr>
+            </a:pPr>
+            <a:r>
+              <a:t>知识点</a:t>
+            </a:r>
+          </a:p>
+        </p:txBody>
+      </p:sp>
+      <p:sp>
+        <p:nvSpPr>
+          <p:cNvPr id="25" name="TextBox 24"/>
+          <p:cNvSpPr txBox="1"/>
+          <p:nvPr/>
+        </p:nvSpPr>
+        <p:spPr>
+          <a:xfrm>
+            <a:off x="7132320" y="4663440"/>
+            <a:ext cx="4114800" cy="914400"/>
+          </a:xfrm>
+          <a:prstGeom prst="rect">
+            <a:avLst/>
+          </a:prstGeom>
+          <a:noFill/>
+        </p:spPr>
+        <p:txBody>
+          <a:bodyPr wrap="square">
+            <a:spAutoFit/>
+          </a:bodyPr>
+          <a:lstStyle/>
+          <a:p>
+            <a:pPr algn="l">
+              <a:lnSpc>
+                <a:spcPts val="1600"/>
+              </a:lnSpc>
+              <a:defRPr sz="1400" b="0" i="0">
+                <a:solidFill>
+                  <a:srgbClr val="503C1E"/>
+                </a:solidFill>
+                <a:latin typeface="微软雅黑"/>
+              </a:defRPr>
+            </a:pPr>
+            <a:r>
+              <a:t>{{ 环节2知识点 }}</a:t>
             </a:r>
           </a:p>
         </p:txBody>
@@ -4606,14 +6862,6 @@
 <file path=ppt/slides/slide6.xml><?xml version="1.0" encoding="utf-8"?>
 <p:sld xmlns:a="http://schemas.openxmlformats.org/drawingml/2006/main" xmlns:p="http://schemas.openxmlformats.org/presentationml/2006/main" xmlns:r="http://schemas.openxmlformats.org/officeDocument/2006/relationships">
   <p:cSld>
-    <p:bg>
-      <p:bgPr>
-        <a:solidFill>
-          <a:srgbClr val="FFFFFF"/>
-        </a:solidFill>
-        <a:effectLst/>
-      </p:bgPr>
-    </p:bg>
     <p:spTree>
       <p:nvGrpSpPr>
         <p:cNvPr id="1" name=""/>
@@ -4630,13 +6878,13 @@
         <p:spPr>
           <a:xfrm>
             <a:off x="0" y="0"/>
-            <a:ext cx="12191695" cy="73152"/>
-          </a:xfrm>
-          <a:prstGeom prst="rect">
-            <a:avLst/>
-          </a:prstGeom>
-          <a:solidFill>
-            <a:srgbClr val="2E7D32"/>
+            <a:ext cx="12191695" cy="6858000"/>
+          </a:xfrm>
+          <a:prstGeom prst="rect">
+            <a:avLst/>
+          </a:prstGeom>
+          <a:solidFill>
+            <a:srgbClr val="FFFFFF"/>
           </a:solidFill>
           <a:ln>
             <a:noFill/>
@@ -4666,50 +6914,14 @@
       </p:sp>
       <p:sp>
         <p:nvSpPr>
-          <p:cNvPr id="3" name="TextBox 2"/>
-          <p:cNvSpPr txBox="1"/>
-          <p:nvPr/>
-        </p:nvSpPr>
-        <p:spPr>
-          <a:xfrm>
-            <a:off x="731520" y="365760"/>
-            <a:ext cx="3657600" cy="731520"/>
-          </a:xfrm>
-          <a:prstGeom prst="rect">
-            <a:avLst/>
-          </a:prstGeom>
-          <a:noFill/>
-        </p:spPr>
-        <p:txBody>
-          <a:bodyPr wrap="square">
-            <a:spAutoFit/>
-          </a:bodyPr>
-          <a:lstStyle/>
-          <a:p>
-            <a:pPr algn="l">
-              <a:defRPr sz="3200" b="1">
-                <a:solidFill>
-                  <a:srgbClr val="1B5E20"/>
-                </a:solidFill>
-                <a:latin typeface="微软雅黑"/>
-              </a:defRPr>
-            </a:pPr>
-            <a:r>
-              <a:t>{{ 环节3标题 }}</a:t>
-            </a:r>
-          </a:p>
-        </p:txBody>
-      </p:sp>
-      <p:sp>
-        <p:nvSpPr>
-          <p:cNvPr id="4" name="Rectangle 3"/>
+          <p:cNvPr id="3" name="Rectangle 2"/>
           <p:cNvSpPr/>
           <p:nvPr/>
         </p:nvSpPr>
         <p:spPr>
           <a:xfrm>
-            <a:off x="731520" y="1097280"/>
-            <a:ext cx="2286000" cy="54864"/>
+            <a:off x="0" y="0"/>
+            <a:ext cx="12191695" cy="109728"/>
           </a:xfrm>
           <a:prstGeom prst="rect">
             <a:avLst/>
@@ -4745,14 +6957,100 @@
       </p:sp>
       <p:sp>
         <p:nvSpPr>
-          <p:cNvPr id="5" name="TextBox 4"/>
+          <p:cNvPr id="4" name="Rectangle 3"/>
+          <p:cNvSpPr/>
+          <p:nvPr/>
+        </p:nvSpPr>
+        <p:spPr>
+          <a:xfrm>
+            <a:off x="0" y="0"/>
+            <a:ext cx="548640" cy="6858000"/>
+          </a:xfrm>
+          <a:prstGeom prst="rect">
+            <a:avLst/>
+          </a:prstGeom>
+          <a:solidFill>
+            <a:srgbClr val="143719"/>
+          </a:solidFill>
+          <a:ln>
+            <a:noFill/>
+          </a:ln>
+        </p:spPr>
+        <p:style>
+          <a:lnRef idx="1">
+            <a:schemeClr val="accent1"/>
+          </a:lnRef>
+          <a:fillRef idx="3">
+            <a:schemeClr val="accent1"/>
+          </a:fillRef>
+          <a:effectRef idx="2">
+            <a:schemeClr val="accent1"/>
+          </a:effectRef>
+          <a:fontRef idx="minor">
+            <a:schemeClr val="lt1"/>
+          </a:fontRef>
+        </p:style>
+        <p:txBody>
+          <a:bodyPr rtlCol="0" anchor="ctr"/>
+          <a:lstStyle/>
+          <a:p>
+            <a:pPr algn="ctr"/>
+          </a:p>
+        </p:txBody>
+      </p:sp>
+      <p:sp>
+        <p:nvSpPr>
+          <p:cNvPr id="5" name="Oval 4"/>
+          <p:cNvSpPr/>
+          <p:nvPr/>
+        </p:nvSpPr>
+        <p:spPr>
+          <a:xfrm>
+            <a:off x="731520" y="548640"/>
+            <a:ext cx="914400" cy="914400"/>
+          </a:xfrm>
+          <a:prstGeom prst="ellipse">
+            <a:avLst/>
+          </a:prstGeom>
+          <a:solidFill>
+            <a:srgbClr val="2E7D32"/>
+          </a:solidFill>
+          <a:ln>
+            <a:noFill/>
+          </a:ln>
+        </p:spPr>
+        <p:style>
+          <a:lnRef idx="1">
+            <a:schemeClr val="accent1"/>
+          </a:lnRef>
+          <a:fillRef idx="3">
+            <a:schemeClr val="accent1"/>
+          </a:fillRef>
+          <a:effectRef idx="2">
+            <a:schemeClr val="accent1"/>
+          </a:effectRef>
+          <a:fontRef idx="minor">
+            <a:schemeClr val="lt1"/>
+          </a:fontRef>
+        </p:style>
+        <p:txBody>
+          <a:bodyPr rtlCol="0" anchor="ctr"/>
+          <a:lstStyle/>
+          <a:p>
+            <a:pPr algn="ctr"/>
+          </a:p>
+        </p:txBody>
+      </p:sp>
+      <p:sp>
+        <p:nvSpPr>
+          <p:cNvPr id="6" name="TextBox 5"/>
           <p:cNvSpPr txBox="1"/>
           <p:nvPr/>
         </p:nvSpPr>
         <p:spPr>
           <a:xfrm>
-            <a:off x="731520" y="1463040"/>
-            <a:ext cx="10515600" cy="457200"/>
+            <a:off x="731520" y="594360"/>
+            <a:ext cx="914400" cy="822960"/>
           </a:xfrm>
           <a:prstGeom prst="rect">
             <a:avLst/>
@@ -4765,30 +7063,33 @@
           </a:bodyPr>
           <a:lstStyle/>
           <a:p>
-            <a:pPr algn="l">
-              <a:defRPr sz="1600" b="0">
+            <a:pPr algn="ctr">
+              <a:lnSpc>
+                <a:spcPts val="4300"/>
+              </a:lnSpc>
+              <a:defRPr sz="3600" b="1" i="0">
                 <a:solidFill>
-                  <a:srgbClr val="888888"/>
+                  <a:srgbClr val="FFFFFF"/>
                 </a:solidFill>
                 <a:latin typeface="微软雅黑"/>
               </a:defRPr>
             </a:pPr>
             <a:r>
-              <a:t>时长：{{ 环节3时长 }}</a:t>
-            </a:r>
-          </a:p>
-        </p:txBody>
-      </p:sp>
-      <p:sp>
-        <p:nvSpPr>
-          <p:cNvPr id="6" name="TextBox 5"/>
+              <a:t>3</a:t>
+            </a:r>
+          </a:p>
+        </p:txBody>
+      </p:sp>
+      <p:sp>
+        <p:nvSpPr>
+          <p:cNvPr id="7" name="TextBox 6"/>
           <p:cNvSpPr txBox="1"/>
           <p:nvPr/>
         </p:nvSpPr>
         <p:spPr>
           <a:xfrm>
-            <a:off x="731520" y="2011680"/>
-            <a:ext cx="10515600" cy="1097280"/>
+            <a:off x="1828800" y="640080"/>
+            <a:ext cx="7315200" cy="731520"/>
           </a:xfrm>
           <a:prstGeom prst="rect">
             <a:avLst/>
@@ -4802,7 +7103,299 @@
           <a:lstStyle/>
           <a:p>
             <a:pPr algn="l">
-              <a:defRPr sz="2000" b="1">
+              <a:lnSpc>
+                <a:spcPts val="3600"/>
+              </a:lnSpc>
+              <a:defRPr sz="3000" b="1" i="0">
+                <a:solidFill>
+                  <a:srgbClr val="143719"/>
+                </a:solidFill>
+                <a:latin typeface="微软雅黑"/>
+              </a:defRPr>
+            </a:pPr>
+            <a:r>
+              <a:t>{{ 环节3标题 }}</a:t>
+            </a:r>
+          </a:p>
+        </p:txBody>
+      </p:sp>
+      <p:sp>
+        <p:nvSpPr>
+          <p:cNvPr id="8" name="Rounded Rectangle 7"/>
+          <p:cNvSpPr/>
+          <p:nvPr/>
+        </p:nvSpPr>
+        <p:spPr>
+          <a:xfrm>
+            <a:off x="9601200" y="731520"/>
+            <a:ext cx="2286000" cy="548640"/>
+          </a:xfrm>
+          <a:prstGeom prst="roundRect">
+            <a:avLst/>
+          </a:prstGeom>
+          <a:solidFill>
+            <a:srgbClr val="328C3C"/>
+          </a:solidFill>
+          <a:ln>
+            <a:noFill/>
+          </a:ln>
+        </p:spPr>
+        <p:style>
+          <a:lnRef idx="1">
+            <a:schemeClr val="accent1"/>
+          </a:lnRef>
+          <a:fillRef idx="3">
+            <a:schemeClr val="accent1"/>
+          </a:fillRef>
+          <a:effectRef idx="2">
+            <a:schemeClr val="accent1"/>
+          </a:effectRef>
+          <a:fontRef idx="minor">
+            <a:schemeClr val="lt1"/>
+          </a:fontRef>
+        </p:style>
+        <p:txBody>
+          <a:bodyPr rtlCol="0" anchor="ctr"/>
+          <a:lstStyle/>
+          <a:p>
+            <a:pPr algn="ctr"/>
+          </a:p>
+        </p:txBody>
+      </p:sp>
+      <p:sp>
+        <p:nvSpPr>
+          <p:cNvPr id="9" name="TextBox 8"/>
+          <p:cNvSpPr txBox="1"/>
+          <p:nvPr/>
+        </p:nvSpPr>
+        <p:spPr>
+          <a:xfrm>
+            <a:off x="9601200" y="749808"/>
+            <a:ext cx="2286000" cy="502920"/>
+          </a:xfrm>
+          <a:prstGeom prst="rect">
+            <a:avLst/>
+          </a:prstGeom>
+          <a:noFill/>
+        </p:spPr>
+        <p:txBody>
+          <a:bodyPr wrap="square">
+            <a:spAutoFit/>
+          </a:bodyPr>
+          <a:lstStyle/>
+          <a:p>
+            <a:pPr algn="ctr">
+              <a:lnSpc>
+                <a:spcPts val="1600"/>
+              </a:lnSpc>
+              <a:defRPr sz="1400" b="1" i="0">
+                <a:solidFill>
+                  <a:srgbClr val="143719"/>
+                </a:solidFill>
+                <a:latin typeface="微软雅黑"/>
+              </a:defRPr>
+            </a:pPr>
+            <a:r>
+              <a:t>⏱ { 环节3时长 }</a:t>
+            </a:r>
+          </a:p>
+        </p:txBody>
+      </p:sp>
+      <p:sp>
+        <p:nvSpPr>
+          <p:cNvPr id="10" name="Rectangle 9"/>
+          <p:cNvSpPr/>
+          <p:nvPr/>
+        </p:nvSpPr>
+        <p:spPr>
+          <a:xfrm>
+            <a:off x="1828800" y="1463040"/>
+            <a:ext cx="3657600" cy="36576"/>
+          </a:xfrm>
+          <a:prstGeom prst="rect">
+            <a:avLst/>
+          </a:prstGeom>
+          <a:solidFill>
+            <a:srgbClr val="2E7D32"/>
+          </a:solidFill>
+          <a:ln>
+            <a:noFill/>
+          </a:ln>
+        </p:spPr>
+        <p:style>
+          <a:lnRef idx="1">
+            <a:schemeClr val="accent1"/>
+          </a:lnRef>
+          <a:fillRef idx="3">
+            <a:schemeClr val="accent1"/>
+          </a:fillRef>
+          <a:effectRef idx="2">
+            <a:schemeClr val="accent1"/>
+          </a:effectRef>
+          <a:fontRef idx="minor">
+            <a:schemeClr val="lt1"/>
+          </a:fontRef>
+        </p:style>
+        <p:txBody>
+          <a:bodyPr rtlCol="0" anchor="ctr"/>
+          <a:lstStyle/>
+          <a:p>
+            <a:pPr algn="ctr"/>
+          </a:p>
+        </p:txBody>
+      </p:sp>
+      <p:sp>
+        <p:nvSpPr>
+          <p:cNvPr id="11" name="Rounded Rectangle 10"/>
+          <p:cNvSpPr/>
+          <p:nvPr/>
+        </p:nvSpPr>
+        <p:spPr>
+          <a:xfrm>
+            <a:off x="731520" y="1828800"/>
+            <a:ext cx="10698480" cy="2011680"/>
+          </a:xfrm>
+          <a:prstGeom prst="roundRect">
+            <a:avLst/>
+          </a:prstGeom>
+          <a:solidFill>
+            <a:srgbClr val="F5F8FC"/>
+          </a:solidFill>
+          <a:ln>
+            <a:noFill/>
+          </a:ln>
+        </p:spPr>
+        <p:style>
+          <a:lnRef idx="1">
+            <a:schemeClr val="accent1"/>
+          </a:lnRef>
+          <a:fillRef idx="3">
+            <a:schemeClr val="accent1"/>
+          </a:fillRef>
+          <a:effectRef idx="2">
+            <a:schemeClr val="accent1"/>
+          </a:effectRef>
+          <a:fontRef idx="minor">
+            <a:schemeClr val="lt1"/>
+          </a:fontRef>
+        </p:style>
+        <p:txBody>
+          <a:bodyPr rtlCol="0" anchor="ctr"/>
+          <a:lstStyle/>
+          <a:p>
+            <a:pPr algn="ctr"/>
+          </a:p>
+        </p:txBody>
+      </p:sp>
+      <p:sp>
+        <p:nvSpPr>
+          <p:cNvPr id="12" name="Rectangle 11"/>
+          <p:cNvSpPr/>
+          <p:nvPr/>
+        </p:nvSpPr>
+        <p:spPr>
+          <a:xfrm>
+            <a:off x="731520" y="1828800"/>
+            <a:ext cx="91440" cy="2011680"/>
+          </a:xfrm>
+          <a:prstGeom prst="rect">
+            <a:avLst/>
+          </a:prstGeom>
+          <a:solidFill>
+            <a:srgbClr val="2E7D32"/>
+          </a:solidFill>
+          <a:ln>
+            <a:noFill/>
+          </a:ln>
+        </p:spPr>
+        <p:style>
+          <a:lnRef idx="1">
+            <a:schemeClr val="accent1"/>
+          </a:lnRef>
+          <a:fillRef idx="3">
+            <a:schemeClr val="accent1"/>
+          </a:fillRef>
+          <a:effectRef idx="2">
+            <a:schemeClr val="accent1"/>
+          </a:effectRef>
+          <a:fontRef idx="minor">
+            <a:schemeClr val="lt1"/>
+          </a:fontRef>
+        </p:style>
+        <p:txBody>
+          <a:bodyPr rtlCol="0" anchor="ctr"/>
+          <a:lstStyle/>
+          <a:p>
+            <a:pPr algn="ctr"/>
+          </a:p>
+        </p:txBody>
+      </p:sp>
+      <p:sp>
+        <p:nvSpPr>
+          <p:cNvPr id="13" name="TextBox 12"/>
+          <p:cNvSpPr txBox="1"/>
+          <p:nvPr/>
+        </p:nvSpPr>
+        <p:spPr>
+          <a:xfrm>
+            <a:off x="1005840" y="1920240"/>
+            <a:ext cx="731520" cy="365760"/>
+          </a:xfrm>
+          <a:prstGeom prst="rect">
+            <a:avLst/>
+          </a:prstGeom>
+          <a:noFill/>
+        </p:spPr>
+        <p:txBody>
+          <a:bodyPr wrap="square">
+            <a:spAutoFit/>
+          </a:bodyPr>
+          <a:lstStyle/>
+          <a:p>
+            <a:pPr algn="l">
+              <a:lnSpc>
+                <a:spcPts val="2400"/>
+              </a:lnSpc>
+              <a:defRPr sz="2000" b="0" i="0">
+                <a:solidFill>
+                  <a:srgbClr val="1A3C5E"/>
+                </a:solidFill>
+                <a:latin typeface="微软雅黑"/>
+              </a:defRPr>
+            </a:pPr>
+            <a:r>
+              <a:t>📖</a:t>
+            </a:r>
+          </a:p>
+        </p:txBody>
+      </p:sp>
+      <p:sp>
+        <p:nvSpPr>
+          <p:cNvPr id="14" name="TextBox 13"/>
+          <p:cNvSpPr txBox="1"/>
+          <p:nvPr/>
+        </p:nvSpPr>
+        <p:spPr>
+          <a:xfrm>
+            <a:off x="1828800" y="1920240"/>
+            <a:ext cx="9144000" cy="365760"/>
+          </a:xfrm>
+          <a:prstGeom prst="rect">
+            <a:avLst/>
+          </a:prstGeom>
+          <a:noFill/>
+        </p:spPr>
+        <p:txBody>
+          <a:bodyPr wrap="square">
+            <a:spAutoFit/>
+          </a:bodyPr>
+          <a:lstStyle/>
+          <a:p>
+            <a:pPr algn="l">
+              <a:lnSpc>
+                <a:spcPts val="1900"/>
+              </a:lnSpc>
+              <a:defRPr sz="1600" b="1" i="0">
                 <a:solidFill>
                   <a:srgbClr val="2E7D32"/>
                 </a:solidFill>
@@ -4810,21 +7403,21 @@
               </a:defRPr>
             </a:pPr>
             <a:r>
-              <a:t>教学内容：</a:t>
-            </a:r>
-          </a:p>
-        </p:txBody>
-      </p:sp>
-      <p:sp>
-        <p:nvSpPr>
-          <p:cNvPr id="7" name="TextBox 6"/>
+              <a:t>教学内容</a:t>
+            </a:r>
+          </a:p>
+        </p:txBody>
+      </p:sp>
+      <p:sp>
+        <p:nvSpPr>
+          <p:cNvPr id="15" name="TextBox 14"/>
           <p:cNvSpPr txBox="1"/>
           <p:nvPr/>
         </p:nvSpPr>
         <p:spPr>
           <a:xfrm>
-            <a:off x="731520" y="2560320"/>
-            <a:ext cx="10515600" cy="1828800"/>
+            <a:off x="1828800" y="2377440"/>
+            <a:ext cx="9144000" cy="1280160"/>
           </a:xfrm>
           <a:prstGeom prst="rect">
             <a:avLst/>
@@ -4838,9 +7431,12 @@
           <a:lstStyle/>
           <a:p>
             <a:pPr algn="l">
-              <a:defRPr sz="1600" b="0">
+              <a:lnSpc>
+                <a:spcPts val="2500"/>
+              </a:lnSpc>
+              <a:defRPr sz="1600" b="0" i="0">
                 <a:solidFill>
-                  <a:srgbClr val="334455"/>
+                  <a:srgbClr val="323C50"/>
                 </a:solidFill>
                 <a:latin typeface="微软雅黑"/>
               </a:defRPr>
@@ -4853,14 +7449,100 @@
       </p:sp>
       <p:sp>
         <p:nvSpPr>
-          <p:cNvPr id="8" name="TextBox 7"/>
+          <p:cNvPr id="16" name="Rounded Rectangle 15"/>
+          <p:cNvSpPr/>
+          <p:nvPr/>
+        </p:nvSpPr>
+        <p:spPr>
+          <a:xfrm>
+            <a:off x="731520" y="4114800"/>
+            <a:ext cx="5029200" cy="1645920"/>
+          </a:xfrm>
+          <a:prstGeom prst="roundRect">
+            <a:avLst/>
+          </a:prstGeom>
+          <a:solidFill>
+            <a:srgbClr val="F0FAF0"/>
+          </a:solidFill>
+          <a:ln>
+            <a:noFill/>
+          </a:ln>
+        </p:spPr>
+        <p:style>
+          <a:lnRef idx="1">
+            <a:schemeClr val="accent1"/>
+          </a:lnRef>
+          <a:fillRef idx="3">
+            <a:schemeClr val="accent1"/>
+          </a:fillRef>
+          <a:effectRef idx="2">
+            <a:schemeClr val="accent1"/>
+          </a:effectRef>
+          <a:fontRef idx="minor">
+            <a:schemeClr val="lt1"/>
+          </a:fontRef>
+        </p:style>
+        <p:txBody>
+          <a:bodyPr rtlCol="0" anchor="ctr"/>
+          <a:lstStyle/>
+          <a:p>
+            <a:pPr algn="ctr"/>
+          </a:p>
+        </p:txBody>
+      </p:sp>
+      <p:sp>
+        <p:nvSpPr>
+          <p:cNvPr id="17" name="Rectangle 16"/>
+          <p:cNvSpPr/>
+          <p:nvPr/>
+        </p:nvSpPr>
+        <p:spPr>
+          <a:xfrm>
+            <a:off x="731520" y="4114800"/>
+            <a:ext cx="91440" cy="1645920"/>
+          </a:xfrm>
+          <a:prstGeom prst="rect">
+            <a:avLst/>
+          </a:prstGeom>
+          <a:solidFill>
+            <a:srgbClr val="3CA050"/>
+          </a:solidFill>
+          <a:ln>
+            <a:noFill/>
+          </a:ln>
+        </p:spPr>
+        <p:style>
+          <a:lnRef idx="1">
+            <a:schemeClr val="accent1"/>
+          </a:lnRef>
+          <a:fillRef idx="3">
+            <a:schemeClr val="accent1"/>
+          </a:fillRef>
+          <a:effectRef idx="2">
+            <a:schemeClr val="accent1"/>
+          </a:effectRef>
+          <a:fontRef idx="minor">
+            <a:schemeClr val="lt1"/>
+          </a:fontRef>
+        </p:style>
+        <p:txBody>
+          <a:bodyPr rtlCol="0" anchor="ctr"/>
+          <a:lstStyle/>
+          <a:p>
+            <a:pPr algn="ctr"/>
+          </a:p>
+        </p:txBody>
+      </p:sp>
+      <p:sp>
+        <p:nvSpPr>
+          <p:cNvPr id="18" name="TextBox 17"/>
           <p:cNvSpPr txBox="1"/>
           <p:nvPr/>
         </p:nvSpPr>
         <p:spPr>
           <a:xfrm>
-            <a:off x="731520" y="4389120"/>
-            <a:ext cx="10515600" cy="548640"/>
+            <a:off x="1005840" y="4206240"/>
+            <a:ext cx="731520" cy="365760"/>
           </a:xfrm>
           <a:prstGeom prst="rect">
             <a:avLst/>
@@ -4874,29 +7556,32 @@
           <a:lstStyle/>
           <a:p>
             <a:pPr algn="l">
-              <a:defRPr sz="1600" b="0">
+              <a:lnSpc>
+                <a:spcPts val="2100"/>
+              </a:lnSpc>
+              <a:defRPr sz="1800" b="0" i="0">
                 <a:solidFill>
-                  <a:srgbClr val="666666"/>
+                  <a:srgbClr val="1A3C5E"/>
                 </a:solidFill>
                 <a:latin typeface="微软雅黑"/>
               </a:defRPr>
             </a:pPr>
             <a:r>
-              <a:t>教学方法：{{ 环节3方法 }}</a:t>
-            </a:r>
-          </a:p>
-        </p:txBody>
-      </p:sp>
-      <p:sp>
-        <p:nvSpPr>
-          <p:cNvPr id="9" name="TextBox 8"/>
+              <a:t>💡</a:t>
+            </a:r>
+          </a:p>
+        </p:txBody>
+      </p:sp>
+      <p:sp>
+        <p:nvSpPr>
+          <p:cNvPr id="19" name="TextBox 18"/>
           <p:cNvSpPr txBox="1"/>
           <p:nvPr/>
         </p:nvSpPr>
         <p:spPr>
           <a:xfrm>
-            <a:off x="731520" y="5029200"/>
-            <a:ext cx="10515600" cy="731520"/>
+            <a:off x="1828800" y="4206240"/>
+            <a:ext cx="3657600" cy="365760"/>
           </a:xfrm>
           <a:prstGeom prst="rect">
             <a:avLst/>
@@ -4910,15 +7595,260 @@
           <a:lstStyle/>
           <a:p>
             <a:pPr algn="l">
-              <a:defRPr sz="1400" b="0">
+              <a:lnSpc>
+                <a:spcPts val="1900"/>
+              </a:lnSpc>
+              <a:defRPr sz="1600" b="1" i="0">
                 <a:solidFill>
-                  <a:srgbClr val="888888"/>
+                  <a:srgbClr val="28783C"/>
                 </a:solidFill>
                 <a:latin typeface="微软雅黑"/>
               </a:defRPr>
             </a:pPr>
             <a:r>
-              <a:t>知识点：{{ 环节3知识点 }}</a:t>
+              <a:t>教学方法</a:t>
+            </a:r>
+          </a:p>
+        </p:txBody>
+      </p:sp>
+      <p:sp>
+        <p:nvSpPr>
+          <p:cNvPr id="20" name="TextBox 19"/>
+          <p:cNvSpPr txBox="1"/>
+          <p:nvPr/>
+        </p:nvSpPr>
+        <p:spPr>
+          <a:xfrm>
+            <a:off x="1828800" y="4663440"/>
+            <a:ext cx="4114800" cy="914400"/>
+          </a:xfrm>
+          <a:prstGeom prst="rect">
+            <a:avLst/>
+          </a:prstGeom>
+          <a:noFill/>
+        </p:spPr>
+        <p:txBody>
+          <a:bodyPr wrap="square">
+            <a:spAutoFit/>
+          </a:bodyPr>
+          <a:lstStyle/>
+          <a:p>
+            <a:pPr algn="l">
+              <a:lnSpc>
+                <a:spcPts val="1600"/>
+              </a:lnSpc>
+              <a:defRPr sz="1400" b="0" i="0">
+                <a:solidFill>
+                  <a:srgbClr val="32463C"/>
+                </a:solidFill>
+                <a:latin typeface="微软雅黑"/>
+              </a:defRPr>
+            </a:pPr>
+            <a:r>
+              <a:t>{{ 环节3方法 }}</a:t>
+            </a:r>
+          </a:p>
+        </p:txBody>
+      </p:sp>
+      <p:sp>
+        <p:nvSpPr>
+          <p:cNvPr id="21" name="Rounded Rectangle 20"/>
+          <p:cNvSpPr/>
+          <p:nvPr/>
+        </p:nvSpPr>
+        <p:spPr>
+          <a:xfrm>
+            <a:off x="6035040" y="4114800"/>
+            <a:ext cx="5394960" cy="1645920"/>
+          </a:xfrm>
+          <a:prstGeom prst="roundRect">
+            <a:avLst/>
+          </a:prstGeom>
+          <a:solidFill>
+            <a:srgbClr val="FFF8F0"/>
+          </a:solidFill>
+          <a:ln>
+            <a:noFill/>
+          </a:ln>
+        </p:spPr>
+        <p:style>
+          <a:lnRef idx="1">
+            <a:schemeClr val="accent1"/>
+          </a:lnRef>
+          <a:fillRef idx="3">
+            <a:schemeClr val="accent1"/>
+          </a:fillRef>
+          <a:effectRef idx="2">
+            <a:schemeClr val="accent1"/>
+          </a:effectRef>
+          <a:fontRef idx="minor">
+            <a:schemeClr val="lt1"/>
+          </a:fontRef>
+        </p:style>
+        <p:txBody>
+          <a:bodyPr rtlCol="0" anchor="ctr"/>
+          <a:lstStyle/>
+          <a:p>
+            <a:pPr algn="ctr"/>
+          </a:p>
+        </p:txBody>
+      </p:sp>
+      <p:sp>
+        <p:nvSpPr>
+          <p:cNvPr id="22" name="Rectangle 21"/>
+          <p:cNvSpPr/>
+          <p:nvPr/>
+        </p:nvSpPr>
+        <p:spPr>
+          <a:xfrm>
+            <a:off x="6035040" y="4114800"/>
+            <a:ext cx="91440" cy="1645920"/>
+          </a:xfrm>
+          <a:prstGeom prst="rect">
+            <a:avLst/>
+          </a:prstGeom>
+          <a:solidFill>
+            <a:srgbClr val="C88C28"/>
+          </a:solidFill>
+          <a:ln>
+            <a:noFill/>
+          </a:ln>
+        </p:spPr>
+        <p:style>
+          <a:lnRef idx="1">
+            <a:schemeClr val="accent1"/>
+          </a:lnRef>
+          <a:fillRef idx="3">
+            <a:schemeClr val="accent1"/>
+          </a:fillRef>
+          <a:effectRef idx="2">
+            <a:schemeClr val="accent1"/>
+          </a:effectRef>
+          <a:fontRef idx="minor">
+            <a:schemeClr val="lt1"/>
+          </a:fontRef>
+        </p:style>
+        <p:txBody>
+          <a:bodyPr rtlCol="0" anchor="ctr"/>
+          <a:lstStyle/>
+          <a:p>
+            <a:pPr algn="ctr"/>
+          </a:p>
+        </p:txBody>
+      </p:sp>
+      <p:sp>
+        <p:nvSpPr>
+          <p:cNvPr id="23" name="TextBox 22"/>
+          <p:cNvSpPr txBox="1"/>
+          <p:nvPr/>
+        </p:nvSpPr>
+        <p:spPr>
+          <a:xfrm>
+            <a:off x="6309360" y="4206240"/>
+            <a:ext cx="731520" cy="365760"/>
+          </a:xfrm>
+          <a:prstGeom prst="rect">
+            <a:avLst/>
+          </a:prstGeom>
+          <a:noFill/>
+        </p:spPr>
+        <p:txBody>
+          <a:bodyPr wrap="square">
+            <a:spAutoFit/>
+          </a:bodyPr>
+          <a:lstStyle/>
+          <a:p>
+            <a:pPr algn="l">
+              <a:lnSpc>
+                <a:spcPts val="2100"/>
+              </a:lnSpc>
+              <a:defRPr sz="1800" b="0" i="0">
+                <a:solidFill>
+                  <a:srgbClr val="1A3C5E"/>
+                </a:solidFill>
+                <a:latin typeface="微软雅黑"/>
+              </a:defRPr>
+            </a:pPr>
+            <a:r>
+              <a:t>🔑</a:t>
+            </a:r>
+          </a:p>
+        </p:txBody>
+      </p:sp>
+      <p:sp>
+        <p:nvSpPr>
+          <p:cNvPr id="24" name="TextBox 23"/>
+          <p:cNvSpPr txBox="1"/>
+          <p:nvPr/>
+        </p:nvSpPr>
+        <p:spPr>
+          <a:xfrm>
+            <a:off x="7132320" y="4206240"/>
+            <a:ext cx="4114800" cy="365760"/>
+          </a:xfrm>
+          <a:prstGeom prst="rect">
+            <a:avLst/>
+          </a:prstGeom>
+          <a:noFill/>
+        </p:spPr>
+        <p:txBody>
+          <a:bodyPr wrap="square">
+            <a:spAutoFit/>
+          </a:bodyPr>
+          <a:lstStyle/>
+          <a:p>
+            <a:pPr algn="l">
+              <a:lnSpc>
+                <a:spcPts val="1900"/>
+              </a:lnSpc>
+              <a:defRPr sz="1600" b="1" i="0">
+                <a:solidFill>
+                  <a:srgbClr val="A06414"/>
+                </a:solidFill>
+                <a:latin typeface="微软雅黑"/>
+              </a:defRPr>
+            </a:pPr>
+            <a:r>
+              <a:t>知识点</a:t>
+            </a:r>
+          </a:p>
+        </p:txBody>
+      </p:sp>
+      <p:sp>
+        <p:nvSpPr>
+          <p:cNvPr id="25" name="TextBox 24"/>
+          <p:cNvSpPr txBox="1"/>
+          <p:nvPr/>
+        </p:nvSpPr>
+        <p:spPr>
+          <a:xfrm>
+            <a:off x="7132320" y="4663440"/>
+            <a:ext cx="4114800" cy="914400"/>
+          </a:xfrm>
+          <a:prstGeom prst="rect">
+            <a:avLst/>
+          </a:prstGeom>
+          <a:noFill/>
+        </p:spPr>
+        <p:txBody>
+          <a:bodyPr wrap="square">
+            <a:spAutoFit/>
+          </a:bodyPr>
+          <a:lstStyle/>
+          <a:p>
+            <a:pPr algn="l">
+              <a:lnSpc>
+                <a:spcPts val="1600"/>
+              </a:lnSpc>
+              <a:defRPr sz="1400" b="0" i="0">
+                <a:solidFill>
+                  <a:srgbClr val="503C1E"/>
+                </a:solidFill>
+                <a:latin typeface="微软雅黑"/>
+              </a:defRPr>
+            </a:pPr>
+            <a:r>
+              <a:t>{{ 环节3知识点 }}</a:t>
             </a:r>
           </a:p>
         </p:txBody>
@@ -4934,14 +7864,6 @@
 <file path=ppt/slides/slide7.xml><?xml version="1.0" encoding="utf-8"?>
 <p:sld xmlns:a="http://schemas.openxmlformats.org/drawingml/2006/main" xmlns:p="http://schemas.openxmlformats.org/presentationml/2006/main" xmlns:r="http://schemas.openxmlformats.org/officeDocument/2006/relationships">
   <p:cSld>
-    <p:bg>
-      <p:bgPr>
-        <a:solidFill>
-          <a:srgbClr val="FFFFFF"/>
-        </a:solidFill>
-        <a:effectLst/>
-      </p:bgPr>
-    </p:bg>
     <p:spTree>
       <p:nvGrpSpPr>
         <p:cNvPr id="1" name=""/>
@@ -4958,13 +7880,13 @@
         <p:spPr>
           <a:xfrm>
             <a:off x="0" y="0"/>
-            <a:ext cx="12191695" cy="73152"/>
-          </a:xfrm>
-          <a:prstGeom prst="rect">
-            <a:avLst/>
-          </a:prstGeom>
-          <a:solidFill>
-            <a:srgbClr val="2E7D32"/>
+            <a:ext cx="12191695" cy="6858000"/>
+          </a:xfrm>
+          <a:prstGeom prst="rect">
+            <a:avLst/>
+          </a:prstGeom>
+          <a:solidFill>
+            <a:srgbClr val="FFFFFF"/>
           </a:solidFill>
           <a:ln>
             <a:noFill/>
@@ -4994,50 +7916,14 @@
       </p:sp>
       <p:sp>
         <p:nvSpPr>
-          <p:cNvPr id="3" name="TextBox 2"/>
-          <p:cNvSpPr txBox="1"/>
-          <p:nvPr/>
-        </p:nvSpPr>
-        <p:spPr>
-          <a:xfrm>
-            <a:off x="731520" y="365760"/>
-            <a:ext cx="3657600" cy="731520"/>
-          </a:xfrm>
-          <a:prstGeom prst="rect">
-            <a:avLst/>
-          </a:prstGeom>
-          <a:noFill/>
-        </p:spPr>
-        <p:txBody>
-          <a:bodyPr wrap="square">
-            <a:spAutoFit/>
-          </a:bodyPr>
-          <a:lstStyle/>
-          <a:p>
-            <a:pPr algn="l">
-              <a:defRPr sz="3200" b="1">
-                <a:solidFill>
-                  <a:srgbClr val="1B5E20"/>
-                </a:solidFill>
-                <a:latin typeface="微软雅黑"/>
-              </a:defRPr>
-            </a:pPr>
-            <a:r>
-              <a:t>案例与资源</a:t>
-            </a:r>
-          </a:p>
-        </p:txBody>
-      </p:sp>
-      <p:sp>
-        <p:nvSpPr>
-          <p:cNvPr id="4" name="Rectangle 3"/>
+          <p:cNvPr id="3" name="Rectangle 2"/>
           <p:cNvSpPr/>
           <p:nvPr/>
         </p:nvSpPr>
         <p:spPr>
           <a:xfrm>
-            <a:off x="731520" y="1097280"/>
-            <a:ext cx="2286000" cy="54864"/>
+            <a:off x="0" y="0"/>
+            <a:ext cx="12191695" cy="109728"/>
           </a:xfrm>
           <a:prstGeom prst="rect">
             <a:avLst/>
@@ -5073,14 +7959,100 @@
       </p:sp>
       <p:sp>
         <p:nvSpPr>
-          <p:cNvPr id="5" name="TextBox 4"/>
+          <p:cNvPr id="4" name="Rectangle 3"/>
+          <p:cNvSpPr/>
+          <p:nvPr/>
+        </p:nvSpPr>
+        <p:spPr>
+          <a:xfrm>
+            <a:off x="0" y="0"/>
+            <a:ext cx="548640" cy="6858000"/>
+          </a:xfrm>
+          <a:prstGeom prst="rect">
+            <a:avLst/>
+          </a:prstGeom>
+          <a:solidFill>
+            <a:srgbClr val="143719"/>
+          </a:solidFill>
+          <a:ln>
+            <a:noFill/>
+          </a:ln>
+        </p:spPr>
+        <p:style>
+          <a:lnRef idx="1">
+            <a:schemeClr val="accent1"/>
+          </a:lnRef>
+          <a:fillRef idx="3">
+            <a:schemeClr val="accent1"/>
+          </a:fillRef>
+          <a:effectRef idx="2">
+            <a:schemeClr val="accent1"/>
+          </a:effectRef>
+          <a:fontRef idx="minor">
+            <a:schemeClr val="lt1"/>
+          </a:fontRef>
+        </p:style>
+        <p:txBody>
+          <a:bodyPr rtlCol="0" anchor="ctr"/>
+          <a:lstStyle/>
+          <a:p>
+            <a:pPr algn="ctr"/>
+          </a:p>
+        </p:txBody>
+      </p:sp>
+      <p:sp>
+        <p:nvSpPr>
+          <p:cNvPr id="5" name="Rectangle 4"/>
+          <p:cNvSpPr/>
+          <p:nvPr/>
+        </p:nvSpPr>
+        <p:spPr>
+          <a:xfrm>
+            <a:off x="548640" y="731520"/>
+            <a:ext cx="4572000" cy="914400"/>
+          </a:xfrm>
+          <a:prstGeom prst="rect">
+            <a:avLst/>
+          </a:prstGeom>
+          <a:solidFill>
+            <a:srgbClr val="2E7D32"/>
+          </a:solidFill>
+          <a:ln>
+            <a:noFill/>
+          </a:ln>
+        </p:spPr>
+        <p:style>
+          <a:lnRef idx="1">
+            <a:schemeClr val="accent1"/>
+          </a:lnRef>
+          <a:fillRef idx="3">
+            <a:schemeClr val="accent1"/>
+          </a:fillRef>
+          <a:effectRef idx="2">
+            <a:schemeClr val="accent1"/>
+          </a:effectRef>
+          <a:fontRef idx="minor">
+            <a:schemeClr val="lt1"/>
+          </a:fontRef>
+        </p:style>
+        <p:txBody>
+          <a:bodyPr rtlCol="0" anchor="ctr"/>
+          <a:lstStyle/>
+          <a:p>
+            <a:pPr algn="ctr"/>
+          </a:p>
+        </p:txBody>
+      </p:sp>
+      <p:sp>
+        <p:nvSpPr>
+          <p:cNvPr id="6" name="TextBox 5"/>
           <p:cNvSpPr txBox="1"/>
           <p:nvPr/>
         </p:nvSpPr>
         <p:spPr>
           <a:xfrm>
-            <a:off x="731520" y="1463040"/>
-            <a:ext cx="10515600" cy="4572000"/>
+            <a:off x="731520" y="777240"/>
+            <a:ext cx="4114800" cy="822960"/>
           </a:xfrm>
           <a:prstGeom prst="rect">
             <a:avLst/>
@@ -5094,9 +8066,180 @@
           <a:lstStyle/>
           <a:p>
             <a:pPr algn="l">
-              <a:defRPr sz="1800" b="0">
+              <a:lnSpc>
+                <a:spcPts val="3600"/>
+              </a:lnSpc>
+              <a:defRPr sz="3000" b="1" i="0">
                 <a:solidFill>
-                  <a:srgbClr val="334455"/>
+                  <a:srgbClr val="FFFFFF"/>
+                </a:solidFill>
+                <a:latin typeface="微软雅黑"/>
+              </a:defRPr>
+            </a:pPr>
+            <a:r>
+              <a:t>📚 案例与资源</a:t>
+            </a:r>
+          </a:p>
+        </p:txBody>
+      </p:sp>
+      <p:sp>
+        <p:nvSpPr>
+          <p:cNvPr id="7" name="Rectangle 6"/>
+          <p:cNvSpPr/>
+          <p:nvPr/>
+        </p:nvSpPr>
+        <p:spPr>
+          <a:xfrm>
+            <a:off x="548640" y="1828800"/>
+            <a:ext cx="2743200" cy="36576"/>
+          </a:xfrm>
+          <a:prstGeom prst="rect">
+            <a:avLst/>
+          </a:prstGeom>
+          <a:solidFill>
+            <a:srgbClr val="2E7D32"/>
+          </a:solidFill>
+          <a:ln>
+            <a:noFill/>
+          </a:ln>
+        </p:spPr>
+        <p:style>
+          <a:lnRef idx="1">
+            <a:schemeClr val="accent1"/>
+          </a:lnRef>
+          <a:fillRef idx="3">
+            <a:schemeClr val="accent1"/>
+          </a:fillRef>
+          <a:effectRef idx="2">
+            <a:schemeClr val="accent1"/>
+          </a:effectRef>
+          <a:fontRef idx="minor">
+            <a:schemeClr val="lt1"/>
+          </a:fontRef>
+        </p:style>
+        <p:txBody>
+          <a:bodyPr rtlCol="0" anchor="ctr"/>
+          <a:lstStyle/>
+          <a:p>
+            <a:pPr algn="ctr"/>
+          </a:p>
+        </p:txBody>
+      </p:sp>
+      <p:sp>
+        <p:nvSpPr>
+          <p:cNvPr id="8" name="Rounded Rectangle 7"/>
+          <p:cNvSpPr/>
+          <p:nvPr/>
+        </p:nvSpPr>
+        <p:spPr>
+          <a:xfrm>
+            <a:off x="731520" y="2103120"/>
+            <a:ext cx="10698480" cy="4114800"/>
+          </a:xfrm>
+          <a:prstGeom prst="roundRect">
+            <a:avLst/>
+          </a:prstGeom>
+          <a:solidFill>
+            <a:srgbClr val="F5F8FC"/>
+          </a:solidFill>
+          <a:ln>
+            <a:noFill/>
+          </a:ln>
+        </p:spPr>
+        <p:style>
+          <a:lnRef idx="1">
+            <a:schemeClr val="accent1"/>
+          </a:lnRef>
+          <a:fillRef idx="3">
+            <a:schemeClr val="accent1"/>
+          </a:fillRef>
+          <a:effectRef idx="2">
+            <a:schemeClr val="accent1"/>
+          </a:effectRef>
+          <a:fontRef idx="minor">
+            <a:schemeClr val="lt1"/>
+          </a:fontRef>
+        </p:style>
+        <p:txBody>
+          <a:bodyPr rtlCol="0" anchor="ctr"/>
+          <a:lstStyle/>
+          <a:p>
+            <a:pPr algn="ctr"/>
+          </a:p>
+        </p:txBody>
+      </p:sp>
+      <p:sp>
+        <p:nvSpPr>
+          <p:cNvPr id="9" name="Rectangle 8"/>
+          <p:cNvSpPr/>
+          <p:nvPr/>
+        </p:nvSpPr>
+        <p:spPr>
+          <a:xfrm>
+            <a:off x="731520" y="2103120"/>
+            <a:ext cx="91440" cy="4114800"/>
+          </a:xfrm>
+          <a:prstGeom prst="rect">
+            <a:avLst/>
+          </a:prstGeom>
+          <a:solidFill>
+            <a:srgbClr val="2E7D32"/>
+          </a:solidFill>
+          <a:ln>
+            <a:noFill/>
+          </a:ln>
+        </p:spPr>
+        <p:style>
+          <a:lnRef idx="1">
+            <a:schemeClr val="accent1"/>
+          </a:lnRef>
+          <a:fillRef idx="3">
+            <a:schemeClr val="accent1"/>
+          </a:fillRef>
+          <a:effectRef idx="2">
+            <a:schemeClr val="accent1"/>
+          </a:effectRef>
+          <a:fontRef idx="minor">
+            <a:schemeClr val="lt1"/>
+          </a:fontRef>
+        </p:style>
+        <p:txBody>
+          <a:bodyPr rtlCol="0" anchor="ctr"/>
+          <a:lstStyle/>
+          <a:p>
+            <a:pPr algn="ctr"/>
+          </a:p>
+        </p:txBody>
+      </p:sp>
+      <p:sp>
+        <p:nvSpPr>
+          <p:cNvPr id="10" name="TextBox 9"/>
+          <p:cNvSpPr txBox="1"/>
+          <p:nvPr/>
+        </p:nvSpPr>
+        <p:spPr>
+          <a:xfrm>
+            <a:off x="1097280" y="2377440"/>
+            <a:ext cx="10058400" cy="3657600"/>
+          </a:xfrm>
+          <a:prstGeom prst="rect">
+            <a:avLst/>
+          </a:prstGeom>
+          <a:noFill/>
+        </p:spPr>
+        <p:txBody>
+          <a:bodyPr wrap="square">
+            <a:spAutoFit/>
+          </a:bodyPr>
+          <a:lstStyle/>
+          <a:p>
+            <a:pPr algn="l">
+              <a:lnSpc>
+                <a:spcPts val="3200"/>
+              </a:lnSpc>
+              <a:defRPr sz="1800" b="0" i="0">
+                <a:solidFill>
+                  <a:srgbClr val="323C50"/>
                 </a:solidFill>
                 <a:latin typeface="微软雅黑"/>
               </a:defRPr>
@@ -5118,14 +8261,6 @@
 <file path=ppt/slides/slide8.xml><?xml version="1.0" encoding="utf-8"?>
 <p:sld xmlns:a="http://schemas.openxmlformats.org/drawingml/2006/main" xmlns:p="http://schemas.openxmlformats.org/presentationml/2006/main" xmlns:r="http://schemas.openxmlformats.org/officeDocument/2006/relationships">
   <p:cSld>
-    <p:bg>
-      <p:bgPr>
-        <a:solidFill>
-          <a:srgbClr val="FFFFFF"/>
-        </a:solidFill>
-        <a:effectLst/>
-      </p:bgPr>
-    </p:bg>
     <p:spTree>
       <p:nvGrpSpPr>
         <p:cNvPr id="1" name=""/>
@@ -5142,13 +8277,13 @@
         <p:spPr>
           <a:xfrm>
             <a:off x="0" y="0"/>
-            <a:ext cx="12191695" cy="73152"/>
-          </a:xfrm>
-          <a:prstGeom prst="rect">
-            <a:avLst/>
-          </a:prstGeom>
-          <a:solidFill>
-            <a:srgbClr val="2E7D32"/>
+            <a:ext cx="12191695" cy="6858000"/>
+          </a:xfrm>
+          <a:prstGeom prst="rect">
+            <a:avLst/>
+          </a:prstGeom>
+          <a:solidFill>
+            <a:srgbClr val="FFFFFF"/>
           </a:solidFill>
           <a:ln>
             <a:noFill/>
@@ -5178,50 +8313,14 @@
       </p:sp>
       <p:sp>
         <p:nvSpPr>
-          <p:cNvPr id="3" name="TextBox 2"/>
-          <p:cNvSpPr txBox="1"/>
-          <p:nvPr/>
-        </p:nvSpPr>
-        <p:spPr>
-          <a:xfrm>
-            <a:off x="731520" y="365760"/>
-            <a:ext cx="3657600" cy="731520"/>
-          </a:xfrm>
-          <a:prstGeom prst="rect">
-            <a:avLst/>
-          </a:prstGeom>
-          <a:noFill/>
-        </p:spPr>
-        <p:txBody>
-          <a:bodyPr wrap="square">
-            <a:spAutoFit/>
-          </a:bodyPr>
-          <a:lstStyle/>
-          <a:p>
-            <a:pPr algn="l">
-              <a:defRPr sz="3200" b="1">
-                <a:solidFill>
-                  <a:srgbClr val="1B5E20"/>
-                </a:solidFill>
-                <a:latin typeface="微软雅黑"/>
-              </a:defRPr>
-            </a:pPr>
-            <a:r>
-              <a:t>课堂练习</a:t>
-            </a:r>
-          </a:p>
-        </p:txBody>
-      </p:sp>
-      <p:sp>
-        <p:nvSpPr>
-          <p:cNvPr id="4" name="Rectangle 3"/>
+          <p:cNvPr id="3" name="Rectangle 2"/>
           <p:cNvSpPr/>
           <p:nvPr/>
         </p:nvSpPr>
         <p:spPr>
           <a:xfrm>
-            <a:off x="731520" y="1097280"/>
-            <a:ext cx="2286000" cy="54864"/>
+            <a:off x="0" y="0"/>
+            <a:ext cx="12191695" cy="109728"/>
           </a:xfrm>
           <a:prstGeom prst="rect">
             <a:avLst/>
@@ -5257,14 +8356,100 @@
       </p:sp>
       <p:sp>
         <p:nvSpPr>
-          <p:cNvPr id="5" name="TextBox 4"/>
+          <p:cNvPr id="4" name="Rectangle 3"/>
+          <p:cNvSpPr/>
+          <p:nvPr/>
+        </p:nvSpPr>
+        <p:spPr>
+          <a:xfrm>
+            <a:off x="0" y="0"/>
+            <a:ext cx="548640" cy="6858000"/>
+          </a:xfrm>
+          <a:prstGeom prst="rect">
+            <a:avLst/>
+          </a:prstGeom>
+          <a:solidFill>
+            <a:srgbClr val="143719"/>
+          </a:solidFill>
+          <a:ln>
+            <a:noFill/>
+          </a:ln>
+        </p:spPr>
+        <p:style>
+          <a:lnRef idx="1">
+            <a:schemeClr val="accent1"/>
+          </a:lnRef>
+          <a:fillRef idx="3">
+            <a:schemeClr val="accent1"/>
+          </a:fillRef>
+          <a:effectRef idx="2">
+            <a:schemeClr val="accent1"/>
+          </a:effectRef>
+          <a:fontRef idx="minor">
+            <a:schemeClr val="lt1"/>
+          </a:fontRef>
+        </p:style>
+        <p:txBody>
+          <a:bodyPr rtlCol="0" anchor="ctr"/>
+          <a:lstStyle/>
+          <a:p>
+            <a:pPr algn="ctr"/>
+          </a:p>
+        </p:txBody>
+      </p:sp>
+      <p:sp>
+        <p:nvSpPr>
+          <p:cNvPr id="5" name="Rectangle 4"/>
+          <p:cNvSpPr/>
+          <p:nvPr/>
+        </p:nvSpPr>
+        <p:spPr>
+          <a:xfrm>
+            <a:off x="548640" y="731520"/>
+            <a:ext cx="4572000" cy="914400"/>
+          </a:xfrm>
+          <a:prstGeom prst="rect">
+            <a:avLst/>
+          </a:prstGeom>
+          <a:solidFill>
+            <a:srgbClr val="2E7D32"/>
+          </a:solidFill>
+          <a:ln>
+            <a:noFill/>
+          </a:ln>
+        </p:spPr>
+        <p:style>
+          <a:lnRef idx="1">
+            <a:schemeClr val="accent1"/>
+          </a:lnRef>
+          <a:fillRef idx="3">
+            <a:schemeClr val="accent1"/>
+          </a:fillRef>
+          <a:effectRef idx="2">
+            <a:schemeClr val="accent1"/>
+          </a:effectRef>
+          <a:fontRef idx="minor">
+            <a:schemeClr val="lt1"/>
+          </a:fontRef>
+        </p:style>
+        <p:txBody>
+          <a:bodyPr rtlCol="0" anchor="ctr"/>
+          <a:lstStyle/>
+          <a:p>
+            <a:pPr algn="ctr"/>
+          </a:p>
+        </p:txBody>
+      </p:sp>
+      <p:sp>
+        <p:nvSpPr>
+          <p:cNvPr id="6" name="TextBox 5"/>
           <p:cNvSpPr txBox="1"/>
           <p:nvPr/>
         </p:nvSpPr>
         <p:spPr>
           <a:xfrm>
-            <a:off x="731520" y="1463040"/>
-            <a:ext cx="10515600" cy="4572000"/>
+            <a:off x="731520" y="777240"/>
+            <a:ext cx="4114800" cy="822960"/>
           </a:xfrm>
           <a:prstGeom prst="rect">
             <a:avLst/>
@@ -5278,9 +8463,180 @@
           <a:lstStyle/>
           <a:p>
             <a:pPr algn="l">
-              <a:defRPr sz="1800" b="0">
+              <a:lnSpc>
+                <a:spcPts val="3600"/>
+              </a:lnSpc>
+              <a:defRPr sz="3000" b="1" i="0">
                 <a:solidFill>
-                  <a:srgbClr val="334455"/>
+                  <a:srgbClr val="FFFFFF"/>
+                </a:solidFill>
+                <a:latin typeface="微软雅黑"/>
+              </a:defRPr>
+            </a:pPr>
+            <a:r>
+              <a:t>✏️ 课堂练习</a:t>
+            </a:r>
+          </a:p>
+        </p:txBody>
+      </p:sp>
+      <p:sp>
+        <p:nvSpPr>
+          <p:cNvPr id="7" name="Rectangle 6"/>
+          <p:cNvSpPr/>
+          <p:nvPr/>
+        </p:nvSpPr>
+        <p:spPr>
+          <a:xfrm>
+            <a:off x="548640" y="1828800"/>
+            <a:ext cx="2743200" cy="36576"/>
+          </a:xfrm>
+          <a:prstGeom prst="rect">
+            <a:avLst/>
+          </a:prstGeom>
+          <a:solidFill>
+            <a:srgbClr val="2E7D32"/>
+          </a:solidFill>
+          <a:ln>
+            <a:noFill/>
+          </a:ln>
+        </p:spPr>
+        <p:style>
+          <a:lnRef idx="1">
+            <a:schemeClr val="accent1"/>
+          </a:lnRef>
+          <a:fillRef idx="3">
+            <a:schemeClr val="accent1"/>
+          </a:fillRef>
+          <a:effectRef idx="2">
+            <a:schemeClr val="accent1"/>
+          </a:effectRef>
+          <a:fontRef idx="minor">
+            <a:schemeClr val="lt1"/>
+          </a:fontRef>
+        </p:style>
+        <p:txBody>
+          <a:bodyPr rtlCol="0" anchor="ctr"/>
+          <a:lstStyle/>
+          <a:p>
+            <a:pPr algn="ctr"/>
+          </a:p>
+        </p:txBody>
+      </p:sp>
+      <p:sp>
+        <p:nvSpPr>
+          <p:cNvPr id="8" name="Rounded Rectangle 7"/>
+          <p:cNvSpPr/>
+          <p:nvPr/>
+        </p:nvSpPr>
+        <p:spPr>
+          <a:xfrm>
+            <a:off x="731520" y="2103120"/>
+            <a:ext cx="10698480" cy="4114800"/>
+          </a:xfrm>
+          <a:prstGeom prst="roundRect">
+            <a:avLst/>
+          </a:prstGeom>
+          <a:solidFill>
+            <a:srgbClr val="F5F8FC"/>
+          </a:solidFill>
+          <a:ln>
+            <a:noFill/>
+          </a:ln>
+        </p:spPr>
+        <p:style>
+          <a:lnRef idx="1">
+            <a:schemeClr val="accent1"/>
+          </a:lnRef>
+          <a:fillRef idx="3">
+            <a:schemeClr val="accent1"/>
+          </a:fillRef>
+          <a:effectRef idx="2">
+            <a:schemeClr val="accent1"/>
+          </a:effectRef>
+          <a:fontRef idx="minor">
+            <a:schemeClr val="lt1"/>
+          </a:fontRef>
+        </p:style>
+        <p:txBody>
+          <a:bodyPr rtlCol="0" anchor="ctr"/>
+          <a:lstStyle/>
+          <a:p>
+            <a:pPr algn="ctr"/>
+          </a:p>
+        </p:txBody>
+      </p:sp>
+      <p:sp>
+        <p:nvSpPr>
+          <p:cNvPr id="9" name="Rectangle 8"/>
+          <p:cNvSpPr/>
+          <p:nvPr/>
+        </p:nvSpPr>
+        <p:spPr>
+          <a:xfrm>
+            <a:off x="731520" y="2103120"/>
+            <a:ext cx="91440" cy="4114800"/>
+          </a:xfrm>
+          <a:prstGeom prst="rect">
+            <a:avLst/>
+          </a:prstGeom>
+          <a:solidFill>
+            <a:srgbClr val="2E7D32"/>
+          </a:solidFill>
+          <a:ln>
+            <a:noFill/>
+          </a:ln>
+        </p:spPr>
+        <p:style>
+          <a:lnRef idx="1">
+            <a:schemeClr val="accent1"/>
+          </a:lnRef>
+          <a:fillRef idx="3">
+            <a:schemeClr val="accent1"/>
+          </a:fillRef>
+          <a:effectRef idx="2">
+            <a:schemeClr val="accent1"/>
+          </a:effectRef>
+          <a:fontRef idx="minor">
+            <a:schemeClr val="lt1"/>
+          </a:fontRef>
+        </p:style>
+        <p:txBody>
+          <a:bodyPr rtlCol="0" anchor="ctr"/>
+          <a:lstStyle/>
+          <a:p>
+            <a:pPr algn="ctr"/>
+          </a:p>
+        </p:txBody>
+      </p:sp>
+      <p:sp>
+        <p:nvSpPr>
+          <p:cNvPr id="10" name="TextBox 9"/>
+          <p:cNvSpPr txBox="1"/>
+          <p:nvPr/>
+        </p:nvSpPr>
+        <p:spPr>
+          <a:xfrm>
+            <a:off x="1097280" y="2377440"/>
+            <a:ext cx="10058400" cy="3657600"/>
+          </a:xfrm>
+          <a:prstGeom prst="rect">
+            <a:avLst/>
+          </a:prstGeom>
+          <a:noFill/>
+        </p:spPr>
+        <p:txBody>
+          <a:bodyPr wrap="square">
+            <a:spAutoFit/>
+          </a:bodyPr>
+          <a:lstStyle/>
+          <a:p>
+            <a:pPr algn="l">
+              <a:lnSpc>
+                <a:spcPts val="3200"/>
+              </a:lnSpc>
+              <a:defRPr sz="1800" b="0" i="0">
+                <a:solidFill>
+                  <a:srgbClr val="323C50"/>
                 </a:solidFill>
                 <a:latin typeface="微软雅黑"/>
               </a:defRPr>
@@ -5302,14 +8658,6 @@
 <file path=ppt/slides/slide9.xml><?xml version="1.0" encoding="utf-8"?>
 <p:sld xmlns:a="http://schemas.openxmlformats.org/drawingml/2006/main" xmlns:p="http://schemas.openxmlformats.org/presentationml/2006/main" xmlns:r="http://schemas.openxmlformats.org/officeDocument/2006/relationships">
   <p:cSld>
-    <p:bg>
-      <p:bgPr>
-        <a:solidFill>
-          <a:srgbClr val="F0F7FA"/>
-        </a:solidFill>
-        <a:effectLst/>
-      </p:bgPr>
-    </p:bg>
     <p:spTree>
       <p:nvGrpSpPr>
         <p:cNvPr id="1" name=""/>
@@ -5326,13 +8674,13 @@
         <p:spPr>
           <a:xfrm>
             <a:off x="0" y="0"/>
-            <a:ext cx="12191695" cy="1097280"/>
-          </a:xfrm>
-          <a:prstGeom prst="rect">
-            <a:avLst/>
-          </a:prstGeom>
-          <a:solidFill>
-            <a:srgbClr val="2E7D32"/>
+            <a:ext cx="12191695" cy="6858000"/>
+          </a:xfrm>
+          <a:prstGeom prst="rect">
+            <a:avLst/>
+          </a:prstGeom>
+          <a:solidFill>
+            <a:srgbClr val="143719"/>
           </a:solidFill>
           <a:ln>
             <a:noFill/>
@@ -5362,20 +8710,20 @@
       </p:sp>
       <p:sp>
         <p:nvSpPr>
-          <p:cNvPr id="3" name="Rectangle 2"/>
+          <p:cNvPr id="3" name="Oval 2"/>
           <p:cNvSpPr/>
           <p:nvPr/>
         </p:nvSpPr>
         <p:spPr>
           <a:xfrm>
-            <a:off x="0" y="5760720"/>
-            <a:ext cx="12191695" cy="1097280"/>
-          </a:xfrm>
-          <a:prstGeom prst="rect">
-            <a:avLst/>
-          </a:prstGeom>
-          <a:solidFill>
-            <a:srgbClr val="1B5E20"/>
+            <a:off x="-914400" y="-914400"/>
+            <a:ext cx="3657600" cy="3657600"/>
+          </a:xfrm>
+          <a:prstGeom prst="ellipse">
+            <a:avLst/>
+          </a:prstGeom>
+          <a:solidFill>
+            <a:srgbClr val="328C3C"/>
           </a:solidFill>
           <a:ln>
             <a:noFill/>
@@ -5405,56 +8753,20 @@
       </p:sp>
       <p:sp>
         <p:nvSpPr>
-          <p:cNvPr id="4" name="TextBox 3"/>
-          <p:cNvSpPr txBox="1"/>
-          <p:nvPr/>
-        </p:nvSpPr>
-        <p:spPr>
-          <a:xfrm>
-            <a:off x="731520" y="1371600"/>
-            <a:ext cx="10515600" cy="731520"/>
-          </a:xfrm>
-          <a:prstGeom prst="rect">
-            <a:avLst/>
-          </a:prstGeom>
-          <a:noFill/>
-        </p:spPr>
-        <p:txBody>
-          <a:bodyPr wrap="square">
-            <a:spAutoFit/>
-          </a:bodyPr>
-          <a:lstStyle/>
-          <a:p>
-            <a:pPr algn="l">
-              <a:defRPr sz="3200" b="1">
-                <a:solidFill>
-                  <a:srgbClr val="1B5E20"/>
-                </a:solidFill>
-                <a:latin typeface="微软雅黑"/>
-              </a:defRPr>
-            </a:pPr>
-            <a:r>
-              <a:t>总结与作业</a:t>
-            </a:r>
-          </a:p>
-        </p:txBody>
-      </p:sp>
-      <p:sp>
-        <p:nvSpPr>
-          <p:cNvPr id="5" name="Rectangle 4"/>
+          <p:cNvPr id="4" name="Oval 3"/>
           <p:cNvSpPr/>
           <p:nvPr/>
         </p:nvSpPr>
         <p:spPr>
           <a:xfrm>
-            <a:off x="731520" y="2103120"/>
-            <a:ext cx="2286000" cy="54864"/>
-          </a:xfrm>
-          <a:prstGeom prst="rect">
-            <a:avLst/>
-          </a:prstGeom>
-          <a:solidFill>
-            <a:srgbClr val="2E7D32"/>
+            <a:off x="9144000" y="4572000"/>
+            <a:ext cx="3657600" cy="3657600"/>
+          </a:xfrm>
+          <a:prstGeom prst="ellipse">
+            <a:avLst/>
+          </a:prstGeom>
+          <a:solidFill>
+            <a:srgbClr val="328C3C"/>
           </a:solidFill>
           <a:ln>
             <a:noFill/>
@@ -5484,14 +8796,57 @@
       </p:sp>
       <p:sp>
         <p:nvSpPr>
+          <p:cNvPr id="5" name="Oval 4"/>
+          <p:cNvSpPr/>
+          <p:nvPr/>
+        </p:nvSpPr>
+        <p:spPr>
+          <a:xfrm>
+            <a:off x="10058400" y="-457200"/>
+            <a:ext cx="2286000" cy="2286000"/>
+          </a:xfrm>
+          <a:prstGeom prst="ellipse">
+            <a:avLst/>
+          </a:prstGeom>
+          <a:solidFill>
+            <a:srgbClr val="2E7D32"/>
+          </a:solidFill>
+          <a:ln>
+            <a:noFill/>
+          </a:ln>
+        </p:spPr>
+        <p:style>
+          <a:lnRef idx="1">
+            <a:schemeClr val="accent1"/>
+          </a:lnRef>
+          <a:fillRef idx="3">
+            <a:schemeClr val="accent1"/>
+          </a:fillRef>
+          <a:effectRef idx="2">
+            <a:schemeClr val="accent1"/>
+          </a:effectRef>
+          <a:fontRef idx="minor">
+            <a:schemeClr val="lt1"/>
+          </a:fontRef>
+        </p:style>
+        <p:txBody>
+          <a:bodyPr rtlCol="0" anchor="ctr"/>
+          <a:lstStyle/>
+          <a:p>
+            <a:pPr algn="ctr"/>
+          </a:p>
+        </p:txBody>
+      </p:sp>
+      <p:sp>
+        <p:nvSpPr>
           <p:cNvPr id="6" name="TextBox 5"/>
           <p:cNvSpPr txBox="1"/>
           <p:nvPr/>
         </p:nvSpPr>
         <p:spPr>
           <a:xfrm>
-            <a:off x="731520" y="2560320"/>
-            <a:ext cx="10515600" cy="1371600"/>
+            <a:off x="1097280" y="731520"/>
+            <a:ext cx="10058400" cy="914400"/>
           </a:xfrm>
           <a:prstGeom prst="rect">
             <a:avLst/>
@@ -5505,7 +8860,135 @@
           <a:lstStyle/>
           <a:p>
             <a:pPr algn="l">
-              <a:defRPr sz="2000" b="1">
+              <a:lnSpc>
+                <a:spcPts val="4300"/>
+              </a:lnSpc>
+              <a:defRPr sz="3600" b="1" i="0">
+                <a:solidFill>
+                  <a:srgbClr val="FFFFFF"/>
+                </a:solidFill>
+                <a:latin typeface="微软雅黑"/>
+              </a:defRPr>
+            </a:pPr>
+            <a:r>
+              <a:t>📝 总结与作业</a:t>
+            </a:r>
+          </a:p>
+        </p:txBody>
+      </p:sp>
+      <p:sp>
+        <p:nvSpPr>
+          <p:cNvPr id="7" name="Rectangle 6"/>
+          <p:cNvSpPr/>
+          <p:nvPr/>
+        </p:nvSpPr>
+        <p:spPr>
+          <a:xfrm>
+            <a:off x="1097280" y="1645920"/>
+            <a:ext cx="2743200" cy="54864"/>
+          </a:xfrm>
+          <a:prstGeom prst="rect">
+            <a:avLst/>
+          </a:prstGeom>
+          <a:solidFill>
+            <a:srgbClr val="2E7D32"/>
+          </a:solidFill>
+          <a:ln>
+            <a:noFill/>
+          </a:ln>
+        </p:spPr>
+        <p:style>
+          <a:lnRef idx="1">
+            <a:schemeClr val="accent1"/>
+          </a:lnRef>
+          <a:fillRef idx="3">
+            <a:schemeClr val="accent1"/>
+          </a:fillRef>
+          <a:effectRef idx="2">
+            <a:schemeClr val="accent1"/>
+          </a:effectRef>
+          <a:fontRef idx="minor">
+            <a:schemeClr val="lt1"/>
+          </a:fontRef>
+        </p:style>
+        <p:txBody>
+          <a:bodyPr rtlCol="0" anchor="ctr"/>
+          <a:lstStyle/>
+          <a:p>
+            <a:pPr algn="ctr"/>
+          </a:p>
+        </p:txBody>
+      </p:sp>
+      <p:sp>
+        <p:nvSpPr>
+          <p:cNvPr id="8" name="Rounded Rectangle 7"/>
+          <p:cNvSpPr/>
+          <p:nvPr/>
+        </p:nvSpPr>
+        <p:spPr>
+          <a:xfrm>
+            <a:off x="731520" y="2011680"/>
+            <a:ext cx="10698480" cy="2011680"/>
+          </a:xfrm>
+          <a:prstGeom prst="roundRect">
+            <a:avLst/>
+          </a:prstGeom>
+          <a:solidFill>
+            <a:srgbClr val="1E3246"/>
+          </a:solidFill>
+          <a:ln>
+            <a:noFill/>
+          </a:ln>
+        </p:spPr>
+        <p:style>
+          <a:lnRef idx="1">
+            <a:schemeClr val="accent1"/>
+          </a:lnRef>
+          <a:fillRef idx="3">
+            <a:schemeClr val="accent1"/>
+          </a:fillRef>
+          <a:effectRef idx="2">
+            <a:schemeClr val="accent1"/>
+          </a:effectRef>
+          <a:fontRef idx="minor">
+            <a:schemeClr val="lt1"/>
+          </a:fontRef>
+        </p:style>
+        <p:txBody>
+          <a:bodyPr rtlCol="0" anchor="ctr"/>
+          <a:lstStyle/>
+          <a:p>
+            <a:pPr algn="ctr"/>
+          </a:p>
+        </p:txBody>
+      </p:sp>
+      <p:sp>
+        <p:nvSpPr>
+          <p:cNvPr id="9" name="TextBox 8"/>
+          <p:cNvSpPr txBox="1"/>
+          <p:nvPr/>
+        </p:nvSpPr>
+        <p:spPr>
+          <a:xfrm>
+            <a:off x="1005840" y="2103120"/>
+            <a:ext cx="1097280" cy="457200"/>
+          </a:xfrm>
+          <a:prstGeom prst="rect">
+            <a:avLst/>
+          </a:prstGeom>
+          <a:noFill/>
+        </p:spPr>
+        <p:txBody>
+          <a:bodyPr wrap="square">
+            <a:spAutoFit/>
+          </a:bodyPr>
+          <a:lstStyle/>
+          <a:p>
+            <a:pPr algn="l">
+              <a:lnSpc>
+                <a:spcPts val="2100"/>
+              </a:lnSpc>
+              <a:defRPr sz="1800" b="1" i="0">
                 <a:solidFill>
                   <a:srgbClr val="2E7D32"/>
                 </a:solidFill>
@@ -5513,21 +8996,21 @@
               </a:defRPr>
             </a:pPr>
             <a:r>
-              <a:t>教学总结：</a:t>
-            </a:r>
-          </a:p>
-        </p:txBody>
-      </p:sp>
-      <p:sp>
-        <p:nvSpPr>
-          <p:cNvPr id="7" name="TextBox 6"/>
+              <a:t>📋 教学总结</a:t>
+            </a:r>
+          </a:p>
+        </p:txBody>
+      </p:sp>
+      <p:sp>
+        <p:nvSpPr>
+          <p:cNvPr id="10" name="TextBox 9"/>
           <p:cNvSpPr txBox="1"/>
           <p:nvPr/>
         </p:nvSpPr>
         <p:spPr>
           <a:xfrm>
-            <a:off x="731520" y="3108960"/>
-            <a:ext cx="10515600" cy="1371600"/>
+            <a:off x="1005840" y="2651760"/>
+            <a:ext cx="10241280" cy="1188720"/>
           </a:xfrm>
           <a:prstGeom prst="rect">
             <a:avLst/>
@@ -5541,9 +9024,12 @@
           <a:lstStyle/>
           <a:p>
             <a:pPr algn="l">
-              <a:defRPr sz="1600" b="0">
+              <a:lnSpc>
+                <a:spcPts val="2500"/>
+              </a:lnSpc>
+              <a:defRPr sz="1600" b="0" i="0">
                 <a:solidFill>
-                  <a:srgbClr val="334455"/>
+                  <a:srgbClr val="C8DCF0"/>
                 </a:solidFill>
                 <a:latin typeface="微软雅黑"/>
               </a:defRPr>
@@ -5556,14 +9042,57 @@
       </p:sp>
       <p:sp>
         <p:nvSpPr>
-          <p:cNvPr id="8" name="TextBox 7"/>
+          <p:cNvPr id="11" name="Rounded Rectangle 10"/>
+          <p:cNvSpPr/>
+          <p:nvPr/>
+        </p:nvSpPr>
+        <p:spPr>
+          <a:xfrm>
+            <a:off x="731520" y="4389120"/>
+            <a:ext cx="10698480" cy="1828800"/>
+          </a:xfrm>
+          <a:prstGeom prst="roundRect">
+            <a:avLst/>
+          </a:prstGeom>
+          <a:solidFill>
+            <a:srgbClr val="1E3246"/>
+          </a:solidFill>
+          <a:ln>
+            <a:noFill/>
+          </a:ln>
+        </p:spPr>
+        <p:style>
+          <a:lnRef idx="1">
+            <a:schemeClr val="accent1"/>
+          </a:lnRef>
+          <a:fillRef idx="3">
+            <a:schemeClr val="accent1"/>
+          </a:fillRef>
+          <a:effectRef idx="2">
+            <a:schemeClr val="accent1"/>
+          </a:effectRef>
+          <a:fontRef idx="minor">
+            <a:schemeClr val="lt1"/>
+          </a:fontRef>
+        </p:style>
+        <p:txBody>
+          <a:bodyPr rtlCol="0" anchor="ctr"/>
+          <a:lstStyle/>
+          <a:p>
+            <a:pPr algn="ctr"/>
+          </a:p>
+        </p:txBody>
+      </p:sp>
+      <p:sp>
+        <p:nvSpPr>
+          <p:cNvPr id="12" name="TextBox 11"/>
           <p:cNvSpPr txBox="1"/>
           <p:nvPr/>
         </p:nvSpPr>
         <p:spPr>
           <a:xfrm>
-            <a:off x="731520" y="4572000"/>
-            <a:ext cx="10515600" cy="914400"/>
+            <a:off x="1005840" y="4480560"/>
+            <a:ext cx="1097280" cy="457200"/>
           </a:xfrm>
           <a:prstGeom prst="rect">
             <a:avLst/>
@@ -5577,15 +9106,57 @@
           <a:lstStyle/>
           <a:p>
             <a:pPr algn="l">
-              <a:defRPr sz="1600" b="0">
+              <a:lnSpc>
+                <a:spcPts val="2100"/>
+              </a:lnSpc>
+              <a:defRPr sz="1800" b="1" i="0">
                 <a:solidFill>
-                  <a:srgbClr val="6688AA"/>
+                  <a:srgbClr val="2E7D32"/>
                 </a:solidFill>
                 <a:latin typeface="微软雅黑"/>
               </a:defRPr>
             </a:pPr>
             <a:r>
-              <a:t>课后任务：{{ 课后任务 }}</a:t>
+              <a:t>📝 课后任务</a:t>
+            </a:r>
+          </a:p>
+        </p:txBody>
+      </p:sp>
+      <p:sp>
+        <p:nvSpPr>
+          <p:cNvPr id="13" name="TextBox 12"/>
+          <p:cNvSpPr txBox="1"/>
+          <p:nvPr/>
+        </p:nvSpPr>
+        <p:spPr>
+          <a:xfrm>
+            <a:off x="1005840" y="5029200"/>
+            <a:ext cx="10241280" cy="1005840"/>
+          </a:xfrm>
+          <a:prstGeom prst="rect">
+            <a:avLst/>
+          </a:prstGeom>
+          <a:noFill/>
+        </p:spPr>
+        <p:txBody>
+          <a:bodyPr wrap="square">
+            <a:spAutoFit/>
+          </a:bodyPr>
+          <a:lstStyle/>
+          <a:p>
+            <a:pPr algn="l">
+              <a:lnSpc>
+                <a:spcPts val="2500"/>
+              </a:lnSpc>
+              <a:defRPr sz="1600" b="0" i="0">
+                <a:solidFill>
+                  <a:srgbClr val="C8DCF0"/>
+                </a:solidFill>
+                <a:latin typeface="微软雅黑"/>
+              </a:defRPr>
+            </a:pPr>
+            <a:r>
+              <a:t>{{ 课后任务 }}</a:t>
             </a:r>
           </a:p>
         </p:txBody>
